--- a/presentations/Final_Presentation.pptx
+++ b/presentations/Final_Presentation.pptx
@@ -123,1153 +123,6 @@
     </p:ext>
   </p:extLst>
 </p:presentation>
-</file>
-
-<file path=ppt/charts/chart1.xml><?xml version="1.0" encoding="utf-8"?>
-<c:chartSpace xmlns:c="http://schemas.openxmlformats.org/drawingml/2006/chart" xmlns:a="http://schemas.openxmlformats.org/drawingml/2006/main" xmlns:r="http://schemas.openxmlformats.org/officeDocument/2006/relationships" xmlns:c16r2="http://schemas.microsoft.com/office/drawing/2015/06/chart">
-  <c:date1904 val="0"/>
-  <c:lang val="tr-TR"/>
-  <c:roundedCorners val="1"/>
-  <c:style val="2"/>
-  <c:chart>
-    <c:autoTitleDeleted val="1"/>
-    <c:plotArea>
-      <c:layout/>
-      <c:barChart>
-        <c:barDir val="bar"/>
-        <c:grouping val="clustered"/>
-        <c:varyColors val="0"/>
-        <c:ser>
-          <c:idx val="0"/>
-          <c:order val="0"/>
-          <c:tx>
-            <c:strRef>
-              <c:f>Sheet1!$B$1</c:f>
-              <c:strCache>
-                <c:ptCount val="1"/>
-                <c:pt idx="0">
-                  <c:v>AUC-ROC</c:v>
-                </c:pt>
-              </c:strCache>
-            </c:strRef>
-          </c:tx>
-          <c:spPr>
-            <a:solidFill>
-              <a:srgbClr val="2D3F55"/>
-            </a:solidFill>
-            <a:effectLst/>
-          </c:spPr>
-          <c:invertIfNegative val="0"/>
-          <c:dPt>
-            <c:idx val="0"/>
-            <c:invertIfNegative val="0"/>
-            <c:bubble3D val="0"/>
-            <c:spPr>
-              <a:solidFill>
-                <a:srgbClr val="2D3F55"/>
-              </a:solidFill>
-              <a:effectLst/>
-            </c:spPr>
-            <c:extLst>
-              <c:ext xmlns:c16="http://schemas.microsoft.com/office/drawing/2014/chart" uri="{C3380CC4-5D6E-409C-BE32-E72D297353CC}">
-                <c16:uniqueId val="{00000001-BA31-4792-A8A9-CCFF3A6A90C2}"/>
-              </c:ext>
-            </c:extLst>
-          </c:dPt>
-          <c:dPt>
-            <c:idx val="1"/>
-            <c:invertIfNegative val="0"/>
-            <c:bubble3D val="0"/>
-            <c:spPr>
-              <a:solidFill>
-                <a:srgbClr val="0D9488"/>
-              </a:solidFill>
-              <a:effectLst/>
-            </c:spPr>
-            <c:extLst>
-              <c:ext xmlns:c16="http://schemas.microsoft.com/office/drawing/2014/chart" uri="{C3380CC4-5D6E-409C-BE32-E72D297353CC}">
-                <c16:uniqueId val="{00000003-BA31-4792-A8A9-CCFF3A6A90C2}"/>
-              </c:ext>
-            </c:extLst>
-          </c:dPt>
-          <c:dPt>
-            <c:idx val="2"/>
-            <c:invertIfNegative val="0"/>
-            <c:bubble3D val="0"/>
-            <c:spPr>
-              <a:solidFill>
-                <a:srgbClr val="3D5A7A"/>
-              </a:solidFill>
-              <a:effectLst/>
-            </c:spPr>
-            <c:extLst>
-              <c:ext xmlns:c16="http://schemas.microsoft.com/office/drawing/2014/chart" uri="{C3380CC4-5D6E-409C-BE32-E72D297353CC}">
-                <c16:uniqueId val="{00000005-BA31-4792-A8A9-CCFF3A6A90C2}"/>
-              </c:ext>
-            </c:extLst>
-          </c:dPt>
-          <c:dLbls>
-            <c:numFmt formatCode="#,##0" sourceLinked="0"/>
-            <c:spPr>
-              <a:noFill/>
-              <a:ln>
-                <a:noFill/>
-              </a:ln>
-              <a:effectLst/>
-            </c:spPr>
-            <c:txPr>
-              <a:bodyPr/>
-              <a:lstStyle/>
-              <a:p>
-                <a:pPr>
-                  <a:defRPr sz="1200" b="0" i="0" u="none" strike="noStrike">
-                    <a:solidFill>
-                      <a:srgbClr val="FFFFFF"/>
-                    </a:solidFill>
-                    <a:latin typeface="Arial"/>
-                  </a:defRPr>
-                </a:pPr>
-                <a:endParaRPr lang="tr-TR"/>
-              </a:p>
-            </c:txPr>
-            <c:showLegendKey val="0"/>
-            <c:showVal val="1"/>
-            <c:showCatName val="0"/>
-            <c:showSerName val="0"/>
-            <c:showPercent val="0"/>
-            <c:showBubbleSize val="0"/>
-            <c:showLeaderLines val="0"/>
-            <c:extLst>
-              <c:ext xmlns:c15="http://schemas.microsoft.com/office/drawing/2012/chart" uri="{CE6537A1-D6FC-4f65-9D91-7224C49458BB}">
-                <c15:showLeaderLines val="0"/>
-              </c:ext>
-            </c:extLst>
-          </c:dLbls>
-          <c:cat>
-            <c:strRef>
-              <c:f>Sheet1!$A$2:$A$4</c:f>
-              <c:strCache>
-                <c:ptCount val="3"/>
-                <c:pt idx="0">
-                  <c:v>STIDE</c:v>
-                </c:pt>
-                <c:pt idx="1">
-                  <c:v>LSTM Syscall</c:v>
-                </c:pt>
-                <c:pt idx="2">
-                  <c:v>LSTM Context</c:v>
-                </c:pt>
-              </c:strCache>
-            </c:strRef>
-          </c:cat>
-          <c:val>
-            <c:numRef>
-              <c:f>Sheet1!$B$2:$B$4</c:f>
-              <c:numCache>
-                <c:formatCode>General</c:formatCode>
-                <c:ptCount val="3"/>
-                <c:pt idx="0">
-                  <c:v>0.99470000000000003</c:v>
-                </c:pt>
-                <c:pt idx="1">
-                  <c:v>0.99619999999999997</c:v>
-                </c:pt>
-                <c:pt idx="2">
-                  <c:v>0.99150000000000005</c:v>
-                </c:pt>
-              </c:numCache>
-            </c:numRef>
-          </c:val>
-          <c:extLst>
-            <c:ext xmlns:c16="http://schemas.microsoft.com/office/drawing/2014/chart" uri="{C3380CC4-5D6E-409C-BE32-E72D297353CC}">
-              <c16:uniqueId val="{00000006-BA31-4792-A8A9-CCFF3A6A90C2}"/>
-            </c:ext>
-          </c:extLst>
-        </c:ser>
-        <c:dLbls>
-          <c:showLegendKey val="0"/>
-          <c:showVal val="1"/>
-          <c:showCatName val="0"/>
-          <c:showSerName val="0"/>
-          <c:showPercent val="0"/>
-          <c:showBubbleSize val="0"/>
-        </c:dLbls>
-        <c:gapWidth val="150"/>
-        <c:axId val="2094734554"/>
-        <c:axId val="2094734552"/>
-      </c:barChart>
-      <c:catAx>
-        <c:axId val="2094734554"/>
-        <c:scaling>
-          <c:orientation val="minMax"/>
-        </c:scaling>
-        <c:delete val="0"/>
-        <c:axPos val="l"/>
-        <c:numFmt formatCode="General" sourceLinked="1"/>
-        <c:majorTickMark val="out"/>
-        <c:minorTickMark val="none"/>
-        <c:tickLblPos val="nextTo"/>
-        <c:spPr>
-          <a:ln w="12700" cap="flat">
-            <a:solidFill>
-              <a:srgbClr val="888888"/>
-            </a:solidFill>
-            <a:prstDash val="solid"/>
-            <a:round/>
-          </a:ln>
-        </c:spPr>
-        <c:txPr>
-          <a:bodyPr/>
-          <a:lstStyle/>
-          <a:p>
-            <a:pPr>
-              <a:defRPr sz="1200" b="0" i="0" u="none" strike="noStrike">
-                <a:solidFill>
-                  <a:srgbClr val="334155"/>
-                </a:solidFill>
-                <a:latin typeface="Arial"/>
-              </a:defRPr>
-            </a:pPr>
-            <a:endParaRPr lang="en-US"/>
-          </a:p>
-        </c:txPr>
-        <c:crossAx val="2094734552"/>
-        <c:crosses val="autoZero"/>
-        <c:auto val="1"/>
-        <c:lblAlgn val="ctr"/>
-        <c:lblOffset val="100"/>
-        <c:noMultiLvlLbl val="1"/>
-      </c:catAx>
-      <c:valAx>
-        <c:axId val="2094734552"/>
-        <c:scaling>
-          <c:orientation val="minMax"/>
-          <c:max val="1"/>
-          <c:min val="0.98"/>
-        </c:scaling>
-        <c:delete val="0"/>
-        <c:axPos val="b"/>
-        <c:majorGridlines>
-          <c:spPr>
-            <a:ln w="6350" cap="flat">
-              <a:solidFill>
-                <a:srgbClr val="E2E8F0"/>
-              </a:solidFill>
-              <a:prstDash val="solid"/>
-              <a:round/>
-            </a:ln>
-          </c:spPr>
-        </c:majorGridlines>
-        <c:numFmt formatCode="General" sourceLinked="0"/>
-        <c:majorTickMark val="out"/>
-        <c:minorTickMark val="none"/>
-        <c:tickLblPos val="low"/>
-        <c:spPr>
-          <a:ln w="12700" cap="flat">
-            <a:solidFill>
-              <a:srgbClr val="888888"/>
-            </a:solidFill>
-            <a:prstDash val="solid"/>
-            <a:round/>
-          </a:ln>
-        </c:spPr>
-        <c:txPr>
-          <a:bodyPr/>
-          <a:lstStyle/>
-          <a:p>
-            <a:pPr>
-              <a:defRPr sz="1200" b="0" i="0" u="none" strike="noStrike">
-                <a:solidFill>
-                  <a:srgbClr val="334155"/>
-                </a:solidFill>
-                <a:latin typeface="Arial"/>
-              </a:defRPr>
-            </a:pPr>
-            <a:endParaRPr lang="en-US"/>
-          </a:p>
-        </c:txPr>
-        <c:crossAx val="2094734554"/>
-        <c:crosses val="autoZero"/>
-        <c:crossBetween val="between"/>
-      </c:valAx>
-      <c:spPr>
-        <a:noFill/>
-        <a:ln>
-          <a:noFill/>
-        </a:ln>
-        <a:effectLst/>
-      </c:spPr>
-    </c:plotArea>
-    <c:plotVisOnly val="1"/>
-    <c:dispBlanksAs val="span"/>
-    <c:showDLblsOverMax val="1"/>
-  </c:chart>
-  <c:spPr>
-    <a:solidFill>
-      <a:srgbClr val="FFFFFF"/>
-    </a:solidFill>
-    <a:ln>
-      <a:noFill/>
-    </a:ln>
-    <a:effectLst/>
-  </c:spPr>
-  <c:externalData r:id="rId1">
-    <c:autoUpdate val="0"/>
-  </c:externalData>
-</c:chartSpace>
-</file>
-
-<file path=ppt/charts/chart2.xml><?xml version="1.0" encoding="utf-8"?>
-<c:chartSpace xmlns:c="http://schemas.openxmlformats.org/drawingml/2006/chart" xmlns:a="http://schemas.openxmlformats.org/drawingml/2006/main" xmlns:r="http://schemas.openxmlformats.org/officeDocument/2006/relationships" xmlns:c16r2="http://schemas.microsoft.com/office/drawing/2015/06/chart">
-  <c:date1904 val="0"/>
-  <c:lang val="tr-TR"/>
-  <c:roundedCorners val="1"/>
-  <c:style val="2"/>
-  <c:chart>
-    <c:autoTitleDeleted val="1"/>
-    <c:plotArea>
-      <c:layout/>
-      <c:barChart>
-        <c:barDir val="col"/>
-        <c:grouping val="clustered"/>
-        <c:varyColors val="0"/>
-        <c:ser>
-          <c:idx val="0"/>
-          <c:order val="0"/>
-          <c:tx>
-            <c:strRef>
-              <c:f>Sheet1!$B$1</c:f>
-              <c:strCache>
-                <c:ptCount val="1"/>
-                <c:pt idx="0">
-                  <c:v>Normal Trace</c:v>
-                </c:pt>
-              </c:strCache>
-            </c:strRef>
-          </c:tx>
-          <c:spPr>
-            <a:solidFill>
-              <a:srgbClr val="2D3F55"/>
-            </a:solidFill>
-            <a:effectLst/>
-          </c:spPr>
-          <c:invertIfNegative val="0"/>
-          <c:cat>
-            <c:strRef>
-              <c:f>Sheet1!$A$2:$A$14</c:f>
-              <c:strCache>
-                <c:ptCount val="13"/>
-                <c:pt idx="0">
-                  <c:v>0.0</c:v>
-                </c:pt>
-                <c:pt idx="1">
-                  <c:v>0.1</c:v>
-                </c:pt>
-                <c:pt idx="2">
-                  <c:v>0.2</c:v>
-                </c:pt>
-                <c:pt idx="3">
-                  <c:v>0.3</c:v>
-                </c:pt>
-                <c:pt idx="4">
-                  <c:v>0.4</c:v>
-                </c:pt>
-                <c:pt idx="5">
-                  <c:v>0.5</c:v>
-                </c:pt>
-                <c:pt idx="6">
-                  <c:v>0.6</c:v>
-                </c:pt>
-                <c:pt idx="7">
-                  <c:v>0.7</c:v>
-                </c:pt>
-                <c:pt idx="8">
-                  <c:v>0.8</c:v>
-                </c:pt>
-                <c:pt idx="9">
-                  <c:v>0.9</c:v>
-                </c:pt>
-                <c:pt idx="10">
-                  <c:v>1.0</c:v>
-                </c:pt>
-                <c:pt idx="11">
-                  <c:v>1.5</c:v>
-                </c:pt>
-                <c:pt idx="12">
-                  <c:v>2.0+</c:v>
-                </c:pt>
-              </c:strCache>
-            </c:strRef>
-          </c:cat>
-          <c:val>
-            <c:numRef>
-              <c:f>Sheet1!$B$2:$B$14</c:f>
-              <c:numCache>
-                <c:formatCode>General</c:formatCode>
-                <c:ptCount val="13"/>
-                <c:pt idx="0">
-                  <c:v>18</c:v>
-                </c:pt>
-                <c:pt idx="1">
-                  <c:v>52</c:v>
-                </c:pt>
-                <c:pt idx="2">
-                  <c:v>88</c:v>
-                </c:pt>
-                <c:pt idx="3">
-                  <c:v>155</c:v>
-                </c:pt>
-                <c:pt idx="4">
-                  <c:v>205</c:v>
-                </c:pt>
-                <c:pt idx="5">
-                  <c:v>148</c:v>
-                </c:pt>
-                <c:pt idx="6">
-                  <c:v>62</c:v>
-                </c:pt>
-                <c:pt idx="7">
-                  <c:v>18</c:v>
-                </c:pt>
-                <c:pt idx="8">
-                  <c:v>5</c:v>
-                </c:pt>
-                <c:pt idx="9">
-                  <c:v>2</c:v>
-                </c:pt>
-                <c:pt idx="10">
-                  <c:v>3</c:v>
-                </c:pt>
-                <c:pt idx="11">
-                  <c:v>4</c:v>
-                </c:pt>
-                <c:pt idx="12">
-                  <c:v>2</c:v>
-                </c:pt>
-              </c:numCache>
-            </c:numRef>
-          </c:val>
-          <c:extLst>
-            <c:ext xmlns:c16="http://schemas.microsoft.com/office/drawing/2014/chart" uri="{C3380CC4-5D6E-409C-BE32-E72D297353CC}">
-              <c16:uniqueId val="{00000000-A4CA-4D4A-A054-F3BEF8B130E7}"/>
-            </c:ext>
-          </c:extLst>
-        </c:ser>
-        <c:ser>
-          <c:idx val="1"/>
-          <c:order val="1"/>
-          <c:tx>
-            <c:strRef>
-              <c:f>Sheet1!$C$1</c:f>
-              <c:strCache>
-                <c:ptCount val="1"/>
-                <c:pt idx="0">
-                  <c:v>Anomali Trace</c:v>
-                </c:pt>
-              </c:strCache>
-            </c:strRef>
-          </c:tx>
-          <c:spPr>
-            <a:solidFill>
-              <a:srgbClr val="EF4444"/>
-            </a:solidFill>
-            <a:effectLst/>
-          </c:spPr>
-          <c:invertIfNegative val="0"/>
-          <c:cat>
-            <c:strRef>
-              <c:f>Sheet1!$A$2:$A$14</c:f>
-              <c:strCache>
-                <c:ptCount val="13"/>
-                <c:pt idx="0">
-                  <c:v>0.0</c:v>
-                </c:pt>
-                <c:pt idx="1">
-                  <c:v>0.1</c:v>
-                </c:pt>
-                <c:pt idx="2">
-                  <c:v>0.2</c:v>
-                </c:pt>
-                <c:pt idx="3">
-                  <c:v>0.3</c:v>
-                </c:pt>
-                <c:pt idx="4">
-                  <c:v>0.4</c:v>
-                </c:pt>
-                <c:pt idx="5">
-                  <c:v>0.5</c:v>
-                </c:pt>
-                <c:pt idx="6">
-                  <c:v>0.6</c:v>
-                </c:pt>
-                <c:pt idx="7">
-                  <c:v>0.7</c:v>
-                </c:pt>
-                <c:pt idx="8">
-                  <c:v>0.8</c:v>
-                </c:pt>
-                <c:pt idx="9">
-                  <c:v>0.9</c:v>
-                </c:pt>
-                <c:pt idx="10">
-                  <c:v>1.0</c:v>
-                </c:pt>
-                <c:pt idx="11">
-                  <c:v>1.5</c:v>
-                </c:pt>
-                <c:pt idx="12">
-                  <c:v>2.0+</c:v>
-                </c:pt>
-              </c:strCache>
-            </c:strRef>
-          </c:cat>
-          <c:val>
-            <c:numRef>
-              <c:f>Sheet1!$C$2:$C$14</c:f>
-              <c:numCache>
-                <c:formatCode>General</c:formatCode>
-                <c:ptCount val="13"/>
-                <c:pt idx="0">
-                  <c:v>0</c:v>
-                </c:pt>
-                <c:pt idx="1">
-                  <c:v>0</c:v>
-                </c:pt>
-                <c:pt idx="2">
-                  <c:v>0</c:v>
-                </c:pt>
-                <c:pt idx="3">
-                  <c:v>0</c:v>
-                </c:pt>
-                <c:pt idx="4">
-                  <c:v>0</c:v>
-                </c:pt>
-                <c:pt idx="5">
-                  <c:v>0</c:v>
-                </c:pt>
-                <c:pt idx="6">
-                  <c:v>0</c:v>
-                </c:pt>
-                <c:pt idx="7">
-                  <c:v>4</c:v>
-                </c:pt>
-                <c:pt idx="8">
-                  <c:v>13</c:v>
-                </c:pt>
-                <c:pt idx="9">
-                  <c:v>18</c:v>
-                </c:pt>
-                <c:pt idx="10">
-                  <c:v>22</c:v>
-                </c:pt>
-                <c:pt idx="11">
-                  <c:v>35</c:v>
-                </c:pt>
-                <c:pt idx="12">
-                  <c:v>22</c:v>
-                </c:pt>
-              </c:numCache>
-            </c:numRef>
-          </c:val>
-          <c:extLst>
-            <c:ext xmlns:c16="http://schemas.microsoft.com/office/drawing/2014/chart" uri="{C3380CC4-5D6E-409C-BE32-E72D297353CC}">
-              <c16:uniqueId val="{00000001-A4CA-4D4A-A054-F3BEF8B130E7}"/>
-            </c:ext>
-          </c:extLst>
-        </c:ser>
-        <c:dLbls>
-          <c:showLegendKey val="0"/>
-          <c:showVal val="0"/>
-          <c:showCatName val="0"/>
-          <c:showSerName val="0"/>
-          <c:showPercent val="0"/>
-          <c:showBubbleSize val="0"/>
-        </c:dLbls>
-        <c:gapWidth val="150"/>
-        <c:axId val="2094734554"/>
-        <c:axId val="2094734552"/>
-      </c:barChart>
-      <c:catAx>
-        <c:axId val="2094734554"/>
-        <c:scaling>
-          <c:orientation val="minMax"/>
-        </c:scaling>
-        <c:delete val="0"/>
-        <c:axPos val="b"/>
-        <c:numFmt formatCode="General" sourceLinked="1"/>
-        <c:majorTickMark val="out"/>
-        <c:minorTickMark val="none"/>
-        <c:tickLblPos val="low"/>
-        <c:spPr>
-          <a:ln w="12700" cap="flat">
-            <a:solidFill>
-              <a:srgbClr val="888888"/>
-            </a:solidFill>
-            <a:prstDash val="solid"/>
-            <a:round/>
-          </a:ln>
-        </c:spPr>
-        <c:txPr>
-          <a:bodyPr/>
-          <a:lstStyle/>
-          <a:p>
-            <a:pPr>
-              <a:defRPr sz="1200" b="0" i="0" u="none" strike="noStrike">
-                <a:solidFill>
-                  <a:srgbClr val="64748B"/>
-                </a:solidFill>
-                <a:latin typeface="Arial"/>
-              </a:defRPr>
-            </a:pPr>
-            <a:endParaRPr lang="en-US"/>
-          </a:p>
-        </c:txPr>
-        <c:crossAx val="2094734552"/>
-        <c:crosses val="autoZero"/>
-        <c:auto val="1"/>
-        <c:lblAlgn val="ctr"/>
-        <c:lblOffset val="100"/>
-        <c:noMultiLvlLbl val="1"/>
-      </c:catAx>
-      <c:valAx>
-        <c:axId val="2094734552"/>
-        <c:scaling>
-          <c:orientation val="minMax"/>
-        </c:scaling>
-        <c:delete val="0"/>
-        <c:axPos val="l"/>
-        <c:majorGridlines>
-          <c:spPr>
-            <a:ln w="6350" cap="flat">
-              <a:solidFill>
-                <a:srgbClr val="E2E8F0"/>
-              </a:solidFill>
-              <a:prstDash val="solid"/>
-              <a:round/>
-            </a:ln>
-          </c:spPr>
-        </c:majorGridlines>
-        <c:numFmt formatCode="General" sourceLinked="0"/>
-        <c:majorTickMark val="out"/>
-        <c:minorTickMark val="none"/>
-        <c:tickLblPos val="nextTo"/>
-        <c:spPr>
-          <a:ln w="12700" cap="flat">
-            <a:solidFill>
-              <a:srgbClr val="888888"/>
-            </a:solidFill>
-            <a:prstDash val="solid"/>
-            <a:round/>
-          </a:ln>
-        </c:spPr>
-        <c:txPr>
-          <a:bodyPr/>
-          <a:lstStyle/>
-          <a:p>
-            <a:pPr>
-              <a:defRPr sz="1200" b="0" i="0" u="none" strike="noStrike">
-                <a:solidFill>
-                  <a:srgbClr val="64748B"/>
-                </a:solidFill>
-                <a:latin typeface="Arial"/>
-              </a:defRPr>
-            </a:pPr>
-            <a:endParaRPr lang="en-US"/>
-          </a:p>
-        </c:txPr>
-        <c:crossAx val="2094734554"/>
-        <c:crosses val="autoZero"/>
-        <c:crossBetween val="between"/>
-      </c:valAx>
-      <c:spPr>
-        <a:noFill/>
-        <a:ln>
-          <a:noFill/>
-        </a:ln>
-        <a:effectLst/>
-      </c:spPr>
-    </c:plotArea>
-    <c:legend>
-      <c:legendPos val="t"/>
-      <c:overlay val="0"/>
-      <c:txPr>
-        <a:bodyPr/>
-        <a:lstStyle/>
-        <a:p>
-          <a:pPr>
-            <a:defRPr sz="1100"/>
-          </a:pPr>
-          <a:endParaRPr lang="en-US"/>
-        </a:p>
-      </c:txPr>
-    </c:legend>
-    <c:plotVisOnly val="1"/>
-    <c:dispBlanksAs val="span"/>
-    <c:showDLblsOverMax val="1"/>
-  </c:chart>
-  <c:spPr>
-    <a:solidFill>
-      <a:srgbClr val="FFFFFF"/>
-    </a:solidFill>
-    <a:ln>
-      <a:noFill/>
-    </a:ln>
-    <a:effectLst/>
-  </c:spPr>
-  <c:externalData r:id="rId1">
-    <c:autoUpdate val="0"/>
-  </c:externalData>
-</c:chartSpace>
-</file>
-
-<file path=ppt/charts/chart3.xml><?xml version="1.0" encoding="utf-8"?>
-<c:chartSpace xmlns:c="http://schemas.openxmlformats.org/drawingml/2006/chart" xmlns:a="http://schemas.openxmlformats.org/drawingml/2006/main" xmlns:r="http://schemas.openxmlformats.org/officeDocument/2006/relationships" xmlns:c16r2="http://schemas.microsoft.com/office/drawing/2015/06/chart">
-  <c:date1904 val="0"/>
-  <c:lang val="tr-TR"/>
-  <c:roundedCorners val="1"/>
-  <c:style val="2"/>
-  <c:chart>
-    <c:autoTitleDeleted val="1"/>
-    <c:plotArea>
-      <c:layout/>
-      <c:lineChart>
-        <c:grouping val="standard"/>
-        <c:varyColors val="0"/>
-        <c:ser>
-          <c:idx val="0"/>
-          <c:order val="0"/>
-          <c:tx>
-            <c:strRef>
-              <c:f>Sheet1!$B$1</c:f>
-              <c:strCache>
-                <c:ptCount val="1"/>
-                <c:pt idx="0">
-                  <c:v>NLL</c:v>
-                </c:pt>
-              </c:strCache>
-            </c:strRef>
-          </c:tx>
-          <c:spPr>
-            <a:ln w="25400" cap="flat">
-              <a:solidFill>
-                <a:srgbClr val="0D9488"/>
-              </a:solidFill>
-              <a:prstDash val="solid"/>
-              <a:round/>
-            </a:ln>
-            <a:effectLst/>
-          </c:spPr>
-          <c:marker>
-            <c:symbol val="circle"/>
-            <c:size val="6"/>
-            <c:spPr>
-              <a:solidFill>
-                <a:srgbClr val="0D9488"/>
-              </a:solidFill>
-              <a:ln w="9525" cap="flat">
-                <a:solidFill>
-                  <a:srgbClr val="0D9488"/>
-                </a:solidFill>
-                <a:prstDash val="solid"/>
-                <a:round/>
-              </a:ln>
-              <a:effectLst/>
-            </c:spPr>
-          </c:marker>
-          <c:cat>
-            <c:strRef>
-              <c:f>Sheet1!$A$2:$A$41</c:f>
-              <c:strCache>
-                <c:ptCount val="40"/>
-                <c:pt idx="0">
-                  <c:v>0</c:v>
-                </c:pt>
-                <c:pt idx="1">
-                  <c:v>1</c:v>
-                </c:pt>
-                <c:pt idx="2">
-                  <c:v>2</c:v>
-                </c:pt>
-                <c:pt idx="3">
-                  <c:v>3</c:v>
-                </c:pt>
-                <c:pt idx="4">
-                  <c:v>4</c:v>
-                </c:pt>
-                <c:pt idx="5">
-                  <c:v>5</c:v>
-                </c:pt>
-                <c:pt idx="6">
-                  <c:v>6</c:v>
-                </c:pt>
-                <c:pt idx="7">
-                  <c:v>7</c:v>
-                </c:pt>
-                <c:pt idx="8">
-                  <c:v>8</c:v>
-                </c:pt>
-                <c:pt idx="9">
-                  <c:v>9</c:v>
-                </c:pt>
-                <c:pt idx="10">
-                  <c:v>10</c:v>
-                </c:pt>
-                <c:pt idx="11">
-                  <c:v>11</c:v>
-                </c:pt>
-                <c:pt idx="12">
-                  <c:v>12</c:v>
-                </c:pt>
-                <c:pt idx="13">
-                  <c:v>13</c:v>
-                </c:pt>
-                <c:pt idx="14">
-                  <c:v>14</c:v>
-                </c:pt>
-                <c:pt idx="15">
-                  <c:v>15</c:v>
-                </c:pt>
-                <c:pt idx="16">
-                  <c:v>16</c:v>
-                </c:pt>
-                <c:pt idx="17">
-                  <c:v>17</c:v>
-                </c:pt>
-                <c:pt idx="18">
-                  <c:v>18</c:v>
-                </c:pt>
-                <c:pt idx="19">
-                  <c:v>19</c:v>
-                </c:pt>
-                <c:pt idx="20">
-                  <c:v>20</c:v>
-                </c:pt>
-                <c:pt idx="21">
-                  <c:v>21</c:v>
-                </c:pt>
-                <c:pt idx="22">
-                  <c:v>22</c:v>
-                </c:pt>
-                <c:pt idx="23">
-                  <c:v>23</c:v>
-                </c:pt>
-                <c:pt idx="24">
-                  <c:v>★24</c:v>
-                </c:pt>
-                <c:pt idx="25">
-                  <c:v>25</c:v>
-                </c:pt>
-                <c:pt idx="26">
-                  <c:v>26</c:v>
-                </c:pt>
-                <c:pt idx="27">
-                  <c:v>27</c:v>
-                </c:pt>
-                <c:pt idx="28">
-                  <c:v>28</c:v>
-                </c:pt>
-                <c:pt idx="29">
-                  <c:v>29</c:v>
-                </c:pt>
-                <c:pt idx="30">
-                  <c:v>30</c:v>
-                </c:pt>
-                <c:pt idx="31">
-                  <c:v>31</c:v>
-                </c:pt>
-                <c:pt idx="32">
-                  <c:v>32</c:v>
-                </c:pt>
-                <c:pt idx="33">
-                  <c:v>33</c:v>
-                </c:pt>
-                <c:pt idx="34">
-                  <c:v>34</c:v>
-                </c:pt>
-                <c:pt idx="35">
-                  <c:v>35</c:v>
-                </c:pt>
-                <c:pt idx="36">
-                  <c:v>36</c:v>
-                </c:pt>
-                <c:pt idx="37">
-                  <c:v>37</c:v>
-                </c:pt>
-                <c:pt idx="38">
-                  <c:v>38</c:v>
-                </c:pt>
-                <c:pt idx="39">
-                  <c:v>39</c:v>
-                </c:pt>
-              </c:strCache>
-            </c:strRef>
-          </c:cat>
-          <c:val>
-            <c:numRef>
-              <c:f>Sheet1!$B$2:$B$41</c:f>
-              <c:numCache>
-                <c:formatCode>General</c:formatCode>
-                <c:ptCount val="40"/>
-                <c:pt idx="0">
-                  <c:v>0.12</c:v>
-                </c:pt>
-                <c:pt idx="1">
-                  <c:v>0.14000000000000001</c:v>
-                </c:pt>
-                <c:pt idx="2">
-                  <c:v>0.11</c:v>
-                </c:pt>
-                <c:pt idx="3">
-                  <c:v>0.13</c:v>
-                </c:pt>
-                <c:pt idx="4">
-                  <c:v>0.12</c:v>
-                </c:pt>
-                <c:pt idx="5">
-                  <c:v>0.14000000000000001</c:v>
-                </c:pt>
-                <c:pt idx="6">
-                  <c:v>0.13</c:v>
-                </c:pt>
-                <c:pt idx="7">
-                  <c:v>0.11</c:v>
-                </c:pt>
-                <c:pt idx="8">
-                  <c:v>0.15</c:v>
-                </c:pt>
-                <c:pt idx="9">
-                  <c:v>0.12</c:v>
-                </c:pt>
-                <c:pt idx="10">
-                  <c:v>0.13</c:v>
-                </c:pt>
-                <c:pt idx="11">
-                  <c:v>0.11</c:v>
-                </c:pt>
-                <c:pt idx="12">
-                  <c:v>0.14000000000000001</c:v>
-                </c:pt>
-                <c:pt idx="13">
-                  <c:v>0.12</c:v>
-                </c:pt>
-                <c:pt idx="14">
-                  <c:v>0.13</c:v>
-                </c:pt>
-                <c:pt idx="15">
-                  <c:v>0.14000000000000001</c:v>
-                </c:pt>
-                <c:pt idx="16">
-                  <c:v>0.12</c:v>
-                </c:pt>
-                <c:pt idx="17">
-                  <c:v>0.11</c:v>
-                </c:pt>
-                <c:pt idx="18">
-                  <c:v>0.13</c:v>
-                </c:pt>
-                <c:pt idx="19">
-                  <c:v>0.12</c:v>
-                </c:pt>
-                <c:pt idx="20">
-                  <c:v>0.13</c:v>
-                </c:pt>
-                <c:pt idx="21">
-                  <c:v>0.14000000000000001</c:v>
-                </c:pt>
-                <c:pt idx="22">
-                  <c:v>0.38</c:v>
-                </c:pt>
-                <c:pt idx="23">
-                  <c:v>0.85</c:v>
-                </c:pt>
-                <c:pt idx="24">
-                  <c:v>3.82</c:v>
-                </c:pt>
-                <c:pt idx="25">
-                  <c:v>4.21</c:v>
-                </c:pt>
-                <c:pt idx="26">
-                  <c:v>3.55</c:v>
-                </c:pt>
-                <c:pt idx="27">
-                  <c:v>2.1</c:v>
-                </c:pt>
-                <c:pt idx="28">
-                  <c:v>1.35</c:v>
-                </c:pt>
-                <c:pt idx="29">
-                  <c:v>0.72</c:v>
-                </c:pt>
-                <c:pt idx="30">
-                  <c:v>0.42</c:v>
-                </c:pt>
-                <c:pt idx="31">
-                  <c:v>0.18</c:v>
-                </c:pt>
-                <c:pt idx="32">
-                  <c:v>0.13</c:v>
-                </c:pt>
-                <c:pt idx="33">
-                  <c:v>0.12</c:v>
-                </c:pt>
-                <c:pt idx="34">
-                  <c:v>0.14000000000000001</c:v>
-                </c:pt>
-                <c:pt idx="35">
-                  <c:v>0.13</c:v>
-                </c:pt>
-                <c:pt idx="36">
-                  <c:v>0.11</c:v>
-                </c:pt>
-                <c:pt idx="37">
-                  <c:v>0.12</c:v>
-                </c:pt>
-                <c:pt idx="38">
-                  <c:v>0.14000000000000001</c:v>
-                </c:pt>
-                <c:pt idx="39">
-                  <c:v>0.13</c:v>
-                </c:pt>
-              </c:numCache>
-            </c:numRef>
-          </c:val>
-          <c:smooth val="0"/>
-          <c:extLst>
-            <c:ext xmlns:c16="http://schemas.microsoft.com/office/drawing/2014/chart" uri="{C3380CC4-5D6E-409C-BE32-E72D297353CC}">
-              <c16:uniqueId val="{00000000-C61A-4829-B774-FAA82DC0F7B0}"/>
-            </c:ext>
-          </c:extLst>
-        </c:ser>
-        <c:dLbls>
-          <c:showLegendKey val="0"/>
-          <c:showVal val="0"/>
-          <c:showCatName val="0"/>
-          <c:showSerName val="0"/>
-          <c:showPercent val="0"/>
-          <c:showBubbleSize val="0"/>
-        </c:dLbls>
-        <c:marker val="1"/>
-        <c:smooth val="0"/>
-        <c:axId val="2094734554"/>
-        <c:axId val="2094734552"/>
-      </c:lineChart>
-      <c:catAx>
-        <c:axId val="2094734554"/>
-        <c:scaling>
-          <c:orientation val="minMax"/>
-        </c:scaling>
-        <c:delete val="0"/>
-        <c:axPos val="b"/>
-        <c:numFmt formatCode="General" sourceLinked="1"/>
-        <c:majorTickMark val="out"/>
-        <c:minorTickMark val="none"/>
-        <c:tickLblPos val="low"/>
-        <c:spPr>
-          <a:ln w="12700" cap="flat">
-            <a:solidFill>
-              <a:srgbClr val="888888"/>
-            </a:solidFill>
-            <a:prstDash val="solid"/>
-            <a:round/>
-          </a:ln>
-        </c:spPr>
-        <c:txPr>
-          <a:bodyPr/>
-          <a:lstStyle/>
-          <a:p>
-            <a:pPr>
-              <a:defRPr sz="1200" b="0" i="0" u="none" strike="noStrike">
-                <a:solidFill>
-                  <a:srgbClr val="64748B"/>
-                </a:solidFill>
-                <a:latin typeface="Arial"/>
-              </a:defRPr>
-            </a:pPr>
-            <a:endParaRPr lang="en-US"/>
-          </a:p>
-        </c:txPr>
-        <c:crossAx val="2094734552"/>
-        <c:crosses val="autoZero"/>
-        <c:auto val="1"/>
-        <c:lblAlgn val="ctr"/>
-        <c:lblOffset val="100"/>
-        <c:noMultiLvlLbl val="1"/>
-      </c:catAx>
-      <c:valAx>
-        <c:axId val="2094734552"/>
-        <c:scaling>
-          <c:orientation val="minMax"/>
-        </c:scaling>
-        <c:delete val="0"/>
-        <c:axPos val="l"/>
-        <c:majorGridlines>
-          <c:spPr>
-            <a:ln w="6350" cap="flat">
-              <a:solidFill>
-                <a:srgbClr val="E2E8F0"/>
-              </a:solidFill>
-              <a:prstDash val="solid"/>
-              <a:round/>
-            </a:ln>
-          </c:spPr>
-        </c:majorGridlines>
-        <c:numFmt formatCode="General" sourceLinked="0"/>
-        <c:majorTickMark val="out"/>
-        <c:minorTickMark val="none"/>
-        <c:tickLblPos val="nextTo"/>
-        <c:spPr>
-          <a:ln w="12700" cap="flat">
-            <a:solidFill>
-              <a:srgbClr val="888888"/>
-            </a:solidFill>
-            <a:prstDash val="solid"/>
-            <a:round/>
-          </a:ln>
-        </c:spPr>
-        <c:txPr>
-          <a:bodyPr/>
-          <a:lstStyle/>
-          <a:p>
-            <a:pPr>
-              <a:defRPr sz="1200" b="0" i="0" u="none" strike="noStrike">
-                <a:solidFill>
-                  <a:srgbClr val="64748B"/>
-                </a:solidFill>
-                <a:latin typeface="Arial"/>
-              </a:defRPr>
-            </a:pPr>
-            <a:endParaRPr lang="en-US"/>
-          </a:p>
-        </c:txPr>
-        <c:crossAx val="2094734554"/>
-        <c:crosses val="autoZero"/>
-        <c:crossBetween val="between"/>
-      </c:valAx>
-      <c:spPr>
-        <a:noFill/>
-        <a:ln>
-          <a:noFill/>
-        </a:ln>
-        <a:effectLst/>
-      </c:spPr>
-    </c:plotArea>
-    <c:plotVisOnly val="1"/>
-    <c:dispBlanksAs val="span"/>
-    <c:showDLblsOverMax val="1"/>
-  </c:chart>
-  <c:spPr>
-    <a:solidFill>
-      <a:srgbClr val="FFFFFF"/>
-    </a:solidFill>
-    <a:ln>
-      <a:noFill/>
-    </a:ln>
-    <a:effectLst/>
-  </c:spPr>
-  <c:externalData r:id="rId1">
-    <c:autoUpdate val="0"/>
-  </c:externalData>
-</c:chartSpace>
 </file>
 
 <file path=ppt/notesMasters/notesMaster1.xml><?xml version="1.0" encoding="utf-8"?>
@@ -3312,61 +2165,6 @@
           </a:p>
         </p:txBody>
       </p:sp>
-      <p:graphicFrame>
-        <p:nvGraphicFramePr>
-          <p:cNvPr id="4" name="Chart 0"/>
-          <p:cNvGraphicFramePr/>
-          <p:nvPr/>
-        </p:nvGraphicFramePr>
-        <p:xfrm>
-          <a:off x="457200" y="1298448"/>
-          <a:ext cx="7132320" cy="4251960"/>
-        </p:xfrm>
-        <a:graphic>
-          <a:graphicData uri="http://schemas.openxmlformats.org/drawingml/2006/chart">
-            <c:chart xmlns:c="http://schemas.openxmlformats.org/drawingml/2006/chart" xmlns:r="http://schemas.openxmlformats.org/officeDocument/2006/relationships" r:id="rId3"/>
-          </a:graphicData>
-        </a:graphic>
-      </p:graphicFrame>
-      <p:sp>
-        <p:nvSpPr>
-          <p:cNvPr id="5" name="Text 2"/>
-          <p:cNvSpPr/>
-          <p:nvPr/>
-        </p:nvSpPr>
-        <p:spPr>
-          <a:xfrm>
-            <a:off x="457200" y="5596128"/>
-            <a:ext cx="7132320" cy="256032"/>
-          </a:xfrm>
-          <a:prstGeom prst="rect">
-            <a:avLst/>
-          </a:prstGeom>
-          <a:noFill/>
-          <a:ln/>
-        </p:spPr>
-        <p:txBody>
-          <a:bodyPr wrap="square" lIns="0" tIns="0" rIns="0" bIns="0" rtlCol="0" anchor="ctr"/>
-          <a:lstStyle/>
-          <a:p>
-            <a:pPr marL="0" indent="0" algn="ctr">
-              <a:buNone/>
-            </a:pPr>
-            <a:r>
-              <a:rPr lang="en-US" sz="900" i="1" dirty="0">
-                <a:solidFill>
-                  <a:srgbClr val="CBD5E1"/>
-                </a:solidFill>
-                <a:latin typeface="Calibri" pitchFamily="34" charset="0"/>
-                <a:ea typeface="Calibri" pitchFamily="34" charset="-122"/>
-                <a:cs typeface="Calibri" pitchFamily="34" charset="-120"/>
-              </a:rPr>
-              <a:t>Trace skor aralığı (yaklaşık gösterim)</a:t>
-            </a:r>
-            <a:endParaRPr lang="en-US" sz="900" dirty="0"/>
-          </a:p>
-        </p:txBody>
-      </p:sp>
       <p:sp>
         <p:nvSpPr>
           <p:cNvPr id="6" name="Shape 3"/>
@@ -3394,117 +2192,14 @@
       </p:sp>
       <p:sp>
         <p:nvSpPr>
-          <p:cNvPr id="7" name="Shape 4"/>
-          <p:cNvSpPr/>
-          <p:nvPr/>
-        </p:nvSpPr>
-        <p:spPr>
-          <a:xfrm>
-            <a:off x="7955280" y="1417320"/>
-            <a:ext cx="594360" cy="420624"/>
-          </a:xfrm>
-          <a:prstGeom prst="rect">
-            <a:avLst/>
-          </a:prstGeom>
-          <a:solidFill>
-            <a:srgbClr val="0D9488"/>
-          </a:solidFill>
-          <a:ln w="12700">
-            <a:solidFill>
-              <a:srgbClr val="0D9488"/>
-            </a:solidFill>
-            <a:prstDash val="solid"/>
-          </a:ln>
-        </p:spPr>
-      </p:sp>
-      <p:sp>
-        <p:nvSpPr>
-          <p:cNvPr id="8" name="Text 5"/>
-          <p:cNvSpPr/>
-          <p:nvPr/>
-        </p:nvSpPr>
-        <p:spPr>
-          <a:xfrm>
-            <a:off x="7955280" y="1417320"/>
-            <a:ext cx="594360" cy="420624"/>
-          </a:xfrm>
-          <a:prstGeom prst="rect">
-            <a:avLst/>
-          </a:prstGeom>
-          <a:noFill/>
-          <a:ln/>
-        </p:spPr>
-        <p:txBody>
-          <a:bodyPr wrap="square" lIns="0" tIns="0" rIns="0" bIns="0" rtlCol="0" anchor="ctr"/>
-          <a:lstStyle/>
-          <a:p>
-            <a:pPr marL="0" indent="0" algn="ctr">
-              <a:buNone/>
-            </a:pPr>
-            <a:r>
-              <a:rPr lang="en-US" sz="900" b="1" dirty="0">
-                <a:solidFill>
-                  <a:srgbClr val="FFFFFF"/>
-                </a:solidFill>
-                <a:latin typeface="Calibri" pitchFamily="34" charset="0"/>
-                <a:ea typeface="Calibri" pitchFamily="34" charset="-122"/>
-                <a:cs typeface="Calibri" pitchFamily="34" charset="-120"/>
-              </a:rPr>
-              <a:t>GAP</a:t>
-            </a:r>
-            <a:endParaRPr lang="en-US" sz="900" dirty="0"/>
-          </a:p>
-        </p:txBody>
-      </p:sp>
-      <p:sp>
-        <p:nvSpPr>
-          <p:cNvPr id="9" name="Text 6"/>
-          <p:cNvSpPr/>
-          <p:nvPr/>
-        </p:nvSpPr>
-        <p:spPr>
-          <a:xfrm>
-            <a:off x="8641080" y="1463040"/>
-            <a:ext cx="3063240" cy="347472"/>
-          </a:xfrm>
-          <a:prstGeom prst="rect">
-            <a:avLst/>
-          </a:prstGeom>
-          <a:noFill/>
-          <a:ln/>
-        </p:spPr>
-        <p:txBody>
-          <a:bodyPr wrap="square" lIns="0" tIns="0" rIns="0" bIns="0" rtlCol="0" anchor="ctr"/>
-          <a:lstStyle/>
-          <a:p>
-            <a:pPr marL="0" indent="0" algn="l">
-              <a:buNone/>
-            </a:pPr>
-            <a:r>
-              <a:rPr lang="en-US" sz="1300" b="1" dirty="0">
-                <a:solidFill>
-                  <a:srgbClr val="1E2D40"/>
-                </a:solidFill>
-                <a:latin typeface="Calibri" pitchFamily="34" charset="0"/>
-                <a:ea typeface="Calibri" pitchFamily="34" charset="-122"/>
-                <a:cs typeface="Calibri" pitchFamily="34" charset="-120"/>
-              </a:rPr>
-              <a:t>Net bir boşluk var</a:t>
-            </a:r>
-            <a:endParaRPr lang="en-US" sz="1300" dirty="0"/>
-          </a:p>
-        </p:txBody>
-      </p:sp>
-      <p:sp>
-        <p:nvSpPr>
           <p:cNvPr id="10" name="Text 7"/>
           <p:cNvSpPr/>
           <p:nvPr/>
         </p:nvSpPr>
         <p:spPr>
           <a:xfrm>
-            <a:off x="8092440" y="1874520"/>
-            <a:ext cx="3611880" cy="704088"/>
+            <a:off x="8092440" y="1538654"/>
+            <a:ext cx="3611880" cy="1039954"/>
           </a:xfrm>
           <a:prstGeom prst="rect">
             <a:avLst/>
@@ -3516,19 +2211,78 @@
           <a:bodyPr wrap="square" lIns="0" tIns="0" rIns="0" bIns="0" rtlCol="0" anchor="t"/>
           <a:lstStyle/>
           <a:p>
-            <a:pPr marL="0" indent="0" algn="l">
-              <a:buNone/>
-            </a:pPr>
-            <a:r>
-              <a:rPr lang="en-US" sz="1100" dirty="0">
-                <a:solidFill>
-                  <a:srgbClr val="334155"/>
-                </a:solidFill>
-                <a:latin typeface="Calibri" pitchFamily="34" charset="0"/>
-                <a:ea typeface="Calibri" pitchFamily="34" charset="-122"/>
-                <a:cs typeface="Calibri" pitchFamily="34" charset="-120"/>
-              </a:rPr>
-              <a:t>Normal trace q99 = 0.55. Anomali trace min = 0.77. İki dağılım arasında temiz bir ayrım mevcut.</a:t>
+            <a:r>
+              <a:rPr lang="tr-TR" sz="1100" b="1" dirty="0"/>
+              <a:t>Net bir ayrışma var</a:t>
+            </a:r>
+            <a:br>
+              <a:rPr lang="tr-TR" sz="1100" dirty="0"/>
+            </a:br>
+            <a:r>
+              <a:rPr lang="tr-TR" sz="1100" dirty="0"/>
+              <a:t>Normal </a:t>
+            </a:r>
+            <a:r>
+              <a:rPr lang="tr-TR" sz="1100" dirty="0" err="1"/>
+              <a:t>trace</a:t>
+            </a:r>
+            <a:r>
+              <a:rPr lang="tr-TR" sz="1100" dirty="0"/>
+              <a:t> q99 = </a:t>
+            </a:r>
+            <a:r>
+              <a:rPr lang="tr-TR" sz="1100" b="1" dirty="0"/>
+              <a:t>0.554</a:t>
+            </a:r>
+            <a:r>
+              <a:rPr lang="tr-TR" sz="1100" dirty="0"/>
+              <a:t>.</a:t>
+            </a:r>
+            <a:br>
+              <a:rPr lang="tr-TR" sz="1100" dirty="0"/>
+            </a:br>
+            <a:r>
+              <a:rPr lang="tr-TR" sz="1100" dirty="0"/>
+              <a:t>Anomali </a:t>
+            </a:r>
+            <a:r>
+              <a:rPr lang="tr-TR" sz="1100" dirty="0" err="1"/>
+              <a:t>trace</a:t>
+            </a:r>
+            <a:r>
+              <a:rPr lang="tr-TR" sz="1100" dirty="0"/>
+              <a:t> minimumu = </a:t>
+            </a:r>
+            <a:r>
+              <a:rPr lang="tr-TR" sz="1100" b="1" dirty="0"/>
+              <a:t>0.773</a:t>
+            </a:r>
+            <a:r>
+              <a:rPr lang="tr-TR" sz="1100" dirty="0"/>
+              <a:t>.</a:t>
+            </a:r>
+            <a:br>
+              <a:rPr lang="tr-TR" sz="1100" dirty="0"/>
+            </a:br>
+            <a:r>
+              <a:rPr lang="tr-TR" sz="1100" dirty="0"/>
+              <a:t>Bu, normal ve </a:t>
+            </a:r>
+            <a:r>
+              <a:rPr lang="tr-TR" sz="1100" dirty="0" err="1"/>
+              <a:t>anomalous</a:t>
+            </a:r>
+            <a:r>
+              <a:rPr lang="tr-TR" sz="1100" dirty="0"/>
+              <a:t> </a:t>
+            </a:r>
+            <a:r>
+              <a:rPr lang="tr-TR" sz="1100" dirty="0" err="1"/>
+              <a:t>trace</a:t>
+            </a:r>
+            <a:r>
+              <a:rPr lang="tr-TR" sz="1100" dirty="0"/>
+              <a:t> skorlarının büyük ölçüde ayrıştığını gösteriyor.</a:t>
             </a:r>
             <a:endParaRPr lang="en-US" sz="1100" dirty="0"/>
           </a:p>
@@ -3561,117 +2315,14 @@
       </p:sp>
       <p:sp>
         <p:nvSpPr>
-          <p:cNvPr id="12" name="Shape 9"/>
-          <p:cNvSpPr/>
-          <p:nvPr/>
-        </p:nvSpPr>
-        <p:spPr>
-          <a:xfrm>
-            <a:off x="7955280" y="2834640"/>
-            <a:ext cx="594360" cy="420624"/>
-          </a:xfrm>
-          <a:prstGeom prst="rect">
-            <a:avLst/>
-          </a:prstGeom>
-          <a:solidFill>
-            <a:srgbClr val="2D3F55"/>
-          </a:solidFill>
-          <a:ln w="12700">
-            <a:solidFill>
-              <a:srgbClr val="2D3F55"/>
-            </a:solidFill>
-            <a:prstDash val="solid"/>
-          </a:ln>
-        </p:spPr>
-      </p:sp>
-      <p:sp>
-        <p:nvSpPr>
-          <p:cNvPr id="13" name="Text 10"/>
-          <p:cNvSpPr/>
-          <p:nvPr/>
-        </p:nvSpPr>
-        <p:spPr>
-          <a:xfrm>
-            <a:off x="7955280" y="2834640"/>
-            <a:ext cx="594360" cy="420624"/>
-          </a:xfrm>
-          <a:prstGeom prst="rect">
-            <a:avLst/>
-          </a:prstGeom>
-          <a:noFill/>
-          <a:ln/>
-        </p:spPr>
-        <p:txBody>
-          <a:bodyPr wrap="square" lIns="0" tIns="0" rIns="0" bIns="0" rtlCol="0" anchor="ctr"/>
-          <a:lstStyle/>
-          <a:p>
-            <a:pPr marL="0" indent="0" algn="ctr">
-              <a:buNone/>
-            </a:pPr>
-            <a:r>
-              <a:rPr lang="en-US" sz="900" b="1" dirty="0">
-                <a:solidFill>
-                  <a:srgbClr val="FFFFFF"/>
-                </a:solidFill>
-                <a:latin typeface="Calibri" pitchFamily="34" charset="0"/>
-                <a:ea typeface="Calibri" pitchFamily="34" charset="-122"/>
-                <a:cs typeface="Calibri" pitchFamily="34" charset="-120"/>
-              </a:rPr>
-              <a:t>q95</a:t>
-            </a:r>
-            <a:endParaRPr lang="en-US" sz="900" dirty="0"/>
-          </a:p>
-        </p:txBody>
-      </p:sp>
-      <p:sp>
-        <p:nvSpPr>
-          <p:cNvPr id="14" name="Text 11"/>
-          <p:cNvSpPr/>
-          <p:nvPr/>
-        </p:nvSpPr>
-        <p:spPr>
-          <a:xfrm>
-            <a:off x="8641080" y="2880360"/>
-            <a:ext cx="3063240" cy="347472"/>
-          </a:xfrm>
-          <a:prstGeom prst="rect">
-            <a:avLst/>
-          </a:prstGeom>
-          <a:noFill/>
-          <a:ln/>
-        </p:spPr>
-        <p:txBody>
-          <a:bodyPr wrap="square" lIns="0" tIns="0" rIns="0" bIns="0" rtlCol="0" anchor="ctr"/>
-          <a:lstStyle/>
-          <a:p>
-            <a:pPr marL="0" indent="0" algn="l">
-              <a:buNone/>
-            </a:pPr>
-            <a:r>
-              <a:rPr lang="en-US" sz="1300" b="1" dirty="0">
-                <a:solidFill>
-                  <a:srgbClr val="1E2D40"/>
-                </a:solidFill>
-                <a:latin typeface="Calibri" pitchFamily="34" charset="0"/>
-                <a:ea typeface="Calibri" pitchFamily="34" charset="-122"/>
-                <a:cs typeface="Calibri" pitchFamily="34" charset="-120"/>
-              </a:rPr>
-              <a:t>Threshold savunulabilir</a:t>
-            </a:r>
-            <a:endParaRPr lang="en-US" sz="1300" dirty="0"/>
-          </a:p>
-        </p:txBody>
-      </p:sp>
-      <p:sp>
-        <p:nvSpPr>
           <p:cNvPr id="15" name="Text 12"/>
           <p:cNvSpPr/>
           <p:nvPr/>
         </p:nvSpPr>
         <p:spPr>
           <a:xfrm>
-            <a:off x="8092440" y="3291840"/>
-            <a:ext cx="3611880" cy="704088"/>
+            <a:off x="8092440" y="2907792"/>
+            <a:ext cx="3611880" cy="1088136"/>
           </a:xfrm>
           <a:prstGeom prst="rect">
             <a:avLst/>
@@ -3683,19 +2334,46 @@
           <a:bodyPr wrap="square" lIns="0" tIns="0" rIns="0" bIns="0" rtlCol="0" anchor="t"/>
           <a:lstStyle/>
           <a:p>
-            <a:pPr marL="0" indent="0" algn="l">
-              <a:buNone/>
-            </a:pPr>
-            <a:r>
-              <a:rPr lang="en-US" sz="1100" dirty="0">
-                <a:solidFill>
-                  <a:srgbClr val="334155"/>
-                </a:solidFill>
-                <a:latin typeface="Calibri" pitchFamily="34" charset="0"/>
-                <a:ea typeface="Calibri" pitchFamily="34" charset="-122"/>
-                <a:cs typeface="Calibri" pitchFamily="34" charset="-120"/>
-              </a:rPr>
-              <a:t>q95 = 0.895 bu boşluğa yerleşiyor. Sadece 762 normalden 7'si eşiği geçiyor (FPR = 0.009).</a:t>
+            <a:r>
+              <a:rPr lang="tr-TR" sz="1100" b="1" dirty="0" err="1"/>
+              <a:t>Threshold</a:t>
+            </a:r>
+            <a:r>
+              <a:rPr lang="tr-TR" sz="1100" b="1" dirty="0"/>
+              <a:t> savunulabilir</a:t>
+            </a:r>
+            <a:br>
+              <a:rPr lang="tr-TR" sz="1100" dirty="0"/>
+            </a:br>
+            <a:r>
+              <a:rPr lang="tr-TR" sz="1100" dirty="0"/>
+              <a:t>q95 = </a:t>
+            </a:r>
+            <a:r>
+              <a:rPr lang="tr-TR" sz="1100" b="1" dirty="0"/>
+              <a:t>0.895</a:t>
+            </a:r>
+            <a:r>
+              <a:rPr lang="tr-TR" sz="1100" dirty="0"/>
+              <a:t> </a:t>
+            </a:r>
+            <a:br>
+              <a:rPr lang="tr-TR" sz="1100" dirty="0"/>
+            </a:br>
+            <a:br>
+              <a:rPr lang="tr-TR" sz="1100" dirty="0"/>
+            </a:br>
+            <a:r>
+              <a:rPr lang="tr-TR" sz="1100" dirty="0"/>
+              <a:t>Sadece 762 normal </a:t>
+            </a:r>
+            <a:r>
+              <a:rPr lang="tr-TR" sz="1100" dirty="0" err="1"/>
+              <a:t>trace’ten</a:t>
+            </a:r>
+            <a:r>
+              <a:rPr lang="tr-TR" sz="1100" dirty="0"/>
+              <a:t> 6’sı bu eşiği geçiyor (FPR = 0.0079).</a:t>
             </a:r>
             <a:endParaRPr lang="en-US" sz="1100" dirty="0"/>
           </a:p>
@@ -3728,70 +2406,6 @@
       </p:sp>
       <p:sp>
         <p:nvSpPr>
-          <p:cNvPr id="17" name="Shape 14"/>
-          <p:cNvSpPr/>
-          <p:nvPr/>
-        </p:nvSpPr>
-        <p:spPr>
-          <a:xfrm>
-            <a:off x="7955280" y="4251960"/>
-            <a:ext cx="594360" cy="420624"/>
-          </a:xfrm>
-          <a:prstGeom prst="rect">
-            <a:avLst/>
-          </a:prstGeom>
-          <a:solidFill>
-            <a:srgbClr val="14B8A6"/>
-          </a:solidFill>
-          <a:ln w="12700">
-            <a:solidFill>
-              <a:srgbClr val="14B8A6"/>
-            </a:solidFill>
-            <a:prstDash val="solid"/>
-          </a:ln>
-        </p:spPr>
-      </p:sp>
-      <p:sp>
-        <p:nvSpPr>
-          <p:cNvPr id="18" name="Text 15"/>
-          <p:cNvSpPr/>
-          <p:nvPr/>
-        </p:nvSpPr>
-        <p:spPr>
-          <a:xfrm>
-            <a:off x="7955280" y="4251960"/>
-            <a:ext cx="594360" cy="420624"/>
-          </a:xfrm>
-          <a:prstGeom prst="rect">
-            <a:avLst/>
-          </a:prstGeom>
-          <a:noFill/>
-          <a:ln/>
-        </p:spPr>
-        <p:txBody>
-          <a:bodyPr wrap="square" lIns="0" tIns="0" rIns="0" bIns="0" rtlCol="0" anchor="ctr"/>
-          <a:lstStyle/>
-          <a:p>
-            <a:pPr marL="0" indent="0" algn="ctr">
-              <a:buNone/>
-            </a:pPr>
-            <a:r>
-              <a:rPr lang="en-US" sz="900" b="1" dirty="0">
-                <a:solidFill>
-                  <a:srgbClr val="FFFFFF"/>
-                </a:solidFill>
-                <a:latin typeface="Calibri" pitchFamily="34" charset="0"/>
-                <a:ea typeface="Calibri" pitchFamily="34" charset="-122"/>
-                <a:cs typeface="Calibri" pitchFamily="34" charset="-120"/>
-              </a:rPr>
-              <a:t>AUC</a:t>
-            </a:r>
-            <a:endParaRPr lang="en-US" sz="900" dirty="0"/>
-          </a:p>
-        </p:txBody>
-      </p:sp>
-      <p:sp>
-        <p:nvSpPr>
           <p:cNvPr id="19" name="Text 16"/>
           <p:cNvSpPr/>
           <p:nvPr/>
@@ -3850,24 +2464,68 @@
           <a:bodyPr wrap="square" lIns="0" tIns="0" rIns="0" bIns="0" rtlCol="0" anchor="t"/>
           <a:lstStyle/>
           <a:p>
-            <a:pPr marL="0" indent="0" algn="l">
-              <a:buNone/>
-            </a:pPr>
-            <a:r>
-              <a:rPr lang="en-US" sz="1100" dirty="0">
-                <a:solidFill>
-                  <a:srgbClr val="334155"/>
-                </a:solidFill>
-                <a:latin typeface="Calibri" pitchFamily="34" charset="0"/>
-                <a:ea typeface="Calibri" pitchFamily="34" charset="-122"/>
-                <a:cs typeface="Calibri" pitchFamily="34" charset="-120"/>
-              </a:rPr>
-              <a:t>Ayrım rastgele değil. Model saldırı sırasında ortaya çıkan nadir syscall geçişlerini yakalıyor.</a:t>
+            <a:r>
+              <a:rPr lang="tr-TR" sz="1100" dirty="0"/>
+              <a:t>Ayrım rastgele değil. Model, normal ve </a:t>
+            </a:r>
+            <a:r>
+              <a:rPr lang="tr-TR" sz="1100" dirty="0" err="1"/>
+              <a:t>anomalous</a:t>
+            </a:r>
+            <a:r>
+              <a:rPr lang="tr-TR" sz="1100" dirty="0"/>
+              <a:t> </a:t>
+            </a:r>
+            <a:r>
+              <a:rPr lang="tr-TR" sz="1100" dirty="0" err="1"/>
+              <a:t>trace’leri</a:t>
+            </a:r>
+            <a:r>
+              <a:rPr lang="tr-TR" sz="1100" dirty="0"/>
+              <a:t> </a:t>
+            </a:r>
+            <a:r>
+              <a:rPr lang="tr-TR" sz="1100" dirty="0" err="1"/>
+              <a:t>threshold’dan</a:t>
+            </a:r>
+            <a:r>
+              <a:rPr lang="tr-TR" sz="1100" dirty="0"/>
+              <a:t> bağımsız olarak da çok güçlü ayırabiliyor.</a:t>
             </a:r>
             <a:endParaRPr lang="en-US" sz="1100" dirty="0"/>
           </a:p>
         </p:txBody>
       </p:sp>
+      <p:pic>
+        <p:nvPicPr>
+          <p:cNvPr id="22" name="Resim 21">
+            <a:extLst>
+              <a:ext uri="{FF2B5EF4-FFF2-40B4-BE49-F238E27FC236}">
+                <a16:creationId xmlns:a16="http://schemas.microsoft.com/office/drawing/2014/main" id="{8366075D-FB3A-085C-C488-69EFE1214113}"/>
+              </a:ext>
+            </a:extLst>
+          </p:cNvPr>
+          <p:cNvPicPr>
+            <a:picLocks noChangeAspect="1"/>
+          </p:cNvPicPr>
+          <p:nvPr/>
+        </p:nvPicPr>
+        <p:blipFill>
+          <a:blip r:embed="rId3"/>
+          <a:stretch>
+            <a:fillRect/>
+          </a:stretch>
+        </p:blipFill>
+        <p:spPr>
+          <a:xfrm>
+            <a:off x="98474" y="1463040"/>
+            <a:ext cx="7846390" cy="4266640"/>
+          </a:xfrm>
+          <a:prstGeom prst="rect">
+            <a:avLst/>
+          </a:prstGeom>
+        </p:spPr>
+      </p:pic>
     </p:spTree>
   </p:cSld>
   <p:clrMapOvr>
@@ -3948,7 +2606,7 @@
         </p:nvSpPr>
         <p:spPr>
           <a:xfrm>
-            <a:off x="457200" y="502920"/>
+            <a:off x="3063240" y="26151"/>
             <a:ext cx="11247120" cy="658368"/>
           </a:xfrm>
           <a:prstGeom prst="rect">
@@ -3976,90 +2634,6 @@
               <a:t>Trace İçi NLL Profili ve Açıklanabilirlik</a:t>
             </a:r>
             <a:endParaRPr lang="en-US" sz="2700" dirty="0"/>
-          </a:p>
-        </p:txBody>
-      </p:sp>
-      <p:sp>
-        <p:nvSpPr>
-          <p:cNvPr id="4" name="Text 2"/>
-          <p:cNvSpPr/>
-          <p:nvPr/>
-        </p:nvSpPr>
-        <p:spPr>
-          <a:xfrm>
-            <a:off x="457200" y="1298448"/>
-            <a:ext cx="7132320" cy="301752"/>
-          </a:xfrm>
-          <a:prstGeom prst="rect">
-            <a:avLst/>
-          </a:prstGeom>
-          <a:noFill/>
-          <a:ln/>
-        </p:spPr>
-        <p:txBody>
-          <a:bodyPr wrap="square" lIns="0" tIns="0" rIns="0" bIns="0" rtlCol="0" anchor="ctr"/>
-          <a:lstStyle/>
-          <a:p>
-            <a:pPr marL="0" indent="0">
-              <a:buNone/>
-            </a:pPr>
-            <a:r>
-              <a:rPr lang="en-US" sz="1200" b="1" dirty="0">
-                <a:solidFill>
-                  <a:srgbClr val="1E2D40"/>
-                </a:solidFill>
-                <a:latin typeface="Calibri" pitchFamily="34" charset="0"/>
-                <a:ea typeface="Calibri" pitchFamily="34" charset="-122"/>
-                <a:cs typeface="Calibri" pitchFamily="34" charset="-120"/>
-              </a:rPr>
-              <a:t>Örnek Anomali Trace — Pencere Bazında NLL Skoru</a:t>
-            </a:r>
-            <a:endParaRPr lang="en-US" sz="1200" dirty="0"/>
-          </a:p>
-        </p:txBody>
-      </p:sp>
-      <p:graphicFrame>
-        <p:nvGraphicFramePr>
-          <p:cNvPr id="5" name="Chart 0"/>
-          <p:cNvGraphicFramePr/>
-          <p:nvPr/>
-        </p:nvGraphicFramePr>
-        <p:xfrm>
-          <a:off x="457200" y="1664208"/>
-          <a:ext cx="7132320" cy="3520440"/>
-        </p:xfrm>
-        <a:graphic>
-          <a:graphicData uri="http://schemas.openxmlformats.org/drawingml/2006/chart">
-            <c:chart xmlns:c="http://schemas.openxmlformats.org/drawingml/2006/chart" xmlns:r="http://schemas.openxmlformats.org/officeDocument/2006/relationships" r:id="rId3"/>
-          </a:graphicData>
-        </a:graphic>
-      </p:graphicFrame>
-      <p:sp>
-        <p:nvSpPr>
-          <p:cNvPr id="6" name="Text 3"/>
-          <p:cNvSpPr/>
-          <p:nvPr/>
-        </p:nvSpPr>
-        <p:spPr>
-          <a:xfrm>
-            <a:off x="457200" y="5239512"/>
-            <a:ext cx="7132320" cy="274320"/>
-          </a:xfrm>
-          <a:prstGeom prst="rect">
-            <a:avLst/>
-          </a:prstGeom>
-          <a:noFill/>
-          <a:ln/>
-        </p:spPr>
-        <p:txBody>
-          <a:bodyPr wrap="square" lIns="0" tIns="0" rIns="0" bIns="0" rtlCol="0" anchor="ctr"/>
-          <a:lstStyle/>
-          <a:p>
-            <a:r>
-              <a:rPr lang="tr-TR" sz="1000" dirty="0"/>
-              <a:t>Pencere 24–25 civarı: en güçlü anomali sinyali</a:t>
-            </a:r>
-            <a:endParaRPr lang="en-US" sz="1000" dirty="0"/>
           </a:p>
         </p:txBody>
       </p:sp>
@@ -4187,63 +2761,25 @@
           <a:bodyPr wrap="square" lIns="0" tIns="0" rIns="0" bIns="0" rtlCol="0" anchor="t"/>
           <a:lstStyle/>
           <a:p>
-            <a:pPr marL="0" indent="0" algn="l">
-              <a:buNone/>
-            </a:pPr>
-            <a:r>
-              <a:rPr lang="en-US" sz="1100" dirty="0">
-                <a:solidFill>
-                  <a:srgbClr val="334155"/>
-                </a:solidFill>
-                <a:latin typeface="Calibri" pitchFamily="34" charset="0"/>
-                <a:ea typeface="Calibri" pitchFamily="34" charset="-122"/>
-                <a:cs typeface="Calibri" pitchFamily="34" charset="-120"/>
-              </a:rPr>
-              <a:t>Saldırı pencerelerinde hiç görülmemiş 6'lı syscall </a:t>
-            </a:r>
-            <a:r>
-              <a:rPr lang="en-US" sz="1100" dirty="0" err="1">
-                <a:solidFill>
-                  <a:srgbClr val="334155"/>
-                </a:solidFill>
-                <a:latin typeface="Calibri" pitchFamily="34" charset="0"/>
-                <a:ea typeface="Calibri" pitchFamily="34" charset="-122"/>
-                <a:cs typeface="Calibri" pitchFamily="34" charset="-120"/>
-              </a:rPr>
-              <a:t>dizileri</a:t>
-            </a:r>
-            <a:r>
-              <a:rPr lang="en-US" sz="1100" dirty="0">
-                <a:solidFill>
-                  <a:srgbClr val="334155"/>
-                </a:solidFill>
-                <a:latin typeface="Calibri" pitchFamily="34" charset="0"/>
-                <a:ea typeface="Calibri" pitchFamily="34" charset="-122"/>
-                <a:cs typeface="Calibri" pitchFamily="34" charset="-120"/>
-              </a:rPr>
-              <a:t> </a:t>
-            </a:r>
-            <a:r>
-              <a:rPr lang="tr-TR" sz="1100" dirty="0">
-                <a:solidFill>
-                  <a:srgbClr val="334155"/>
-                </a:solidFill>
-                <a:latin typeface="Calibri" pitchFamily="34" charset="0"/>
-                <a:ea typeface="Calibri" pitchFamily="34" charset="-122"/>
-                <a:cs typeface="Calibri" pitchFamily="34" charset="-120"/>
-              </a:rPr>
-              <a:t>ile</a:t>
-            </a:r>
-            <a:r>
-              <a:rPr lang="en-US" sz="1100" dirty="0">
-                <a:solidFill>
-                  <a:srgbClr val="334155"/>
-                </a:solidFill>
-                <a:latin typeface="Calibri" pitchFamily="34" charset="0"/>
-                <a:ea typeface="Calibri" pitchFamily="34" charset="-122"/>
-                <a:cs typeface="Calibri" pitchFamily="34" charset="-120"/>
-              </a:rPr>
-              <a:t> mismatch oranı artıyor.</a:t>
+            <a:r>
+              <a:rPr lang="tr-TR" sz="1100" dirty="0"/>
+              <a:t>Yüksek skorlu pencerelerde daha önce görülmemiş 6’lı </a:t>
+            </a:r>
+            <a:r>
+              <a:rPr lang="tr-TR" sz="1100" dirty="0" err="1"/>
+              <a:t>syscall</a:t>
+            </a:r>
+            <a:r>
+              <a:rPr lang="tr-TR" sz="1100" dirty="0"/>
+              <a:t> dizileri nedeniyle </a:t>
+            </a:r>
+            <a:r>
+              <a:rPr lang="tr-TR" sz="1100" dirty="0" err="1"/>
+              <a:t>mismatch</a:t>
+            </a:r>
+            <a:r>
+              <a:rPr lang="tr-TR" sz="1100" dirty="0"/>
+              <a:t> oranı artıyor.</a:t>
             </a:r>
             <a:endParaRPr lang="en-US" sz="1100" dirty="0"/>
           </a:p>
@@ -4334,63 +2870,37 @@
           <a:bodyPr wrap="square" lIns="0" tIns="0" rIns="0" bIns="0" rtlCol="0" anchor="t"/>
           <a:lstStyle/>
           <a:p>
-            <a:pPr marL="0" indent="0" algn="l">
-              <a:buNone/>
-            </a:pPr>
-            <a:r>
-              <a:rPr lang="tr-TR" sz="1100" dirty="0">
-                <a:solidFill>
-                  <a:srgbClr val="334155"/>
-                </a:solidFill>
-                <a:latin typeface="Calibri" pitchFamily="34" charset="0"/>
-                <a:ea typeface="Calibri" pitchFamily="34" charset="-122"/>
-                <a:cs typeface="Calibri" pitchFamily="34" charset="-120"/>
-              </a:rPr>
-              <a:t>s</a:t>
-            </a:r>
-            <a:r>
-              <a:rPr lang="en-US" sz="1100" dirty="0">
-                <a:solidFill>
-                  <a:srgbClr val="334155"/>
-                </a:solidFill>
-                <a:latin typeface="Calibri" pitchFamily="34" charset="0"/>
-                <a:ea typeface="Calibri" pitchFamily="34" charset="-122"/>
-                <a:cs typeface="Calibri" pitchFamily="34" charset="-120"/>
-              </a:rPr>
-              <a:t>elect</a:t>
-            </a:r>
-            <a:r>
-              <a:rPr lang="tr-TR" sz="1100" dirty="0">
-                <a:solidFill>
-                  <a:srgbClr val="334155"/>
-                </a:solidFill>
-                <a:latin typeface="Calibri" pitchFamily="34" charset="0"/>
-                <a:ea typeface="Calibri" pitchFamily="34" charset="-122"/>
-                <a:cs typeface="Calibri" pitchFamily="34" charset="-120"/>
-              </a:rPr>
-              <a:t> </a:t>
-            </a:r>
-            <a:r>
-              <a:rPr lang="en-US" sz="1100" dirty="0">
-                <a:solidFill>
-                  <a:srgbClr val="334155"/>
-                </a:solidFill>
-                <a:latin typeface="Calibri" pitchFamily="34" charset="0"/>
-                <a:ea typeface="Calibri" pitchFamily="34" charset="-122"/>
-                <a:cs typeface="Calibri" pitchFamily="34" charset="-120"/>
-              </a:rPr>
-              <a:t>wait4 döngüsü yerine execve, chmod, open </a:t>
-            </a:r>
-            <a:r>
-              <a:rPr lang="en-US" sz="1100" dirty="0" err="1">
-                <a:solidFill>
-                  <a:srgbClr val="334155"/>
-                </a:solidFill>
-                <a:latin typeface="Calibri" pitchFamily="34" charset="0"/>
-                <a:ea typeface="Calibri" pitchFamily="34" charset="-122"/>
-                <a:cs typeface="Calibri" pitchFamily="34" charset="-120"/>
-              </a:rPr>
-              <a:t>geçişleri</a:t>
+            <a:r>
+              <a:rPr lang="tr-TR" sz="1100" dirty="0" err="1"/>
+              <a:t>select</a:t>
+            </a:r>
+            <a:r>
+              <a:rPr lang="tr-TR" sz="1100" dirty="0"/>
+              <a:t>/wait4 ağırlıklı normal akış yerine </a:t>
+            </a:r>
+            <a:r>
+              <a:rPr lang="tr-TR" sz="1100" dirty="0" err="1"/>
+              <a:t>execve</a:t>
+            </a:r>
+            <a:r>
+              <a:rPr lang="tr-TR" sz="1100" dirty="0"/>
+              <a:t>, </a:t>
+            </a:r>
+            <a:r>
+              <a:rPr lang="tr-TR" sz="1100" dirty="0" err="1"/>
+              <a:t>chmod</a:t>
+            </a:r>
+            <a:r>
+              <a:rPr lang="tr-TR" sz="1100" dirty="0"/>
+              <a:t> ve </a:t>
+            </a:r>
+            <a:r>
+              <a:rPr lang="tr-TR" sz="1100" dirty="0" err="1"/>
+              <a:t>open</a:t>
+            </a:r>
+            <a:r>
+              <a:rPr lang="tr-TR" sz="1100" dirty="0"/>
+              <a:t> gibi geçişleri daha düşük olasılıklı buluyor.</a:t>
             </a:r>
             <a:endParaRPr lang="en-US" sz="1100" dirty="0"/>
           </a:p>
@@ -4481,46 +2991,82 @@
           <a:bodyPr wrap="square" lIns="0" tIns="0" rIns="0" bIns="0" rtlCol="0" anchor="t"/>
           <a:lstStyle/>
           <a:p>
-            <a:pPr marL="0" indent="0" algn="l">
-              <a:buNone/>
-            </a:pPr>
-            <a:r>
-              <a:rPr lang="en-US" sz="1100" dirty="0">
-                <a:solidFill>
-                  <a:srgbClr val="334155"/>
-                </a:solidFill>
-                <a:latin typeface="Calibri" pitchFamily="34" charset="0"/>
-                <a:ea typeface="Calibri" pitchFamily="34" charset="-122"/>
-                <a:cs typeface="Calibri" pitchFamily="34" charset="-120"/>
-              </a:rPr>
-              <a:t>apache2 sürecinin execve </a:t>
-            </a:r>
-            <a:r>
-              <a:rPr lang="en-US" sz="1100" dirty="0" err="1">
-                <a:solidFill>
-                  <a:srgbClr val="334155"/>
-                </a:solidFill>
-                <a:latin typeface="Calibri" pitchFamily="34" charset="0"/>
-                <a:ea typeface="Calibri" pitchFamily="34" charset="-122"/>
-                <a:cs typeface="Calibri" pitchFamily="34" charset="-120"/>
-              </a:rPr>
-              <a:t>yapması</a:t>
-            </a:r>
-            <a:r>
-              <a:rPr lang="en-US" sz="1100" dirty="0">
-                <a:solidFill>
-                  <a:srgbClr val="334155"/>
-                </a:solidFill>
-                <a:latin typeface="Calibri" pitchFamily="34" charset="0"/>
-                <a:ea typeface="Calibri" pitchFamily="34" charset="-122"/>
-                <a:cs typeface="Calibri" pitchFamily="34" charset="-120"/>
-              </a:rPr>
-              <a:t> hem syscall hem process bağlamı görülmemiş kombinasyon.</a:t>
+            <a:r>
+              <a:rPr lang="tr-TR" sz="1100" dirty="0"/>
+              <a:t>apache2 sürecinin </a:t>
+            </a:r>
+            <a:r>
+              <a:rPr lang="tr-TR" sz="1100" dirty="0" err="1"/>
+              <a:t>execve</a:t>
+            </a:r>
+            <a:r>
+              <a:rPr lang="tr-TR" sz="1100" dirty="0"/>
+              <a:t> ile görülmesi normal akışa göre daha sıra dışı bir kombinasyon oluşturuyor.</a:t>
             </a:r>
             <a:endParaRPr lang="en-US" sz="1100" dirty="0"/>
           </a:p>
         </p:txBody>
       </p:sp>
+      <p:pic>
+        <p:nvPicPr>
+          <p:cNvPr id="20" name="Resim 19">
+            <a:extLst>
+              <a:ext uri="{FF2B5EF4-FFF2-40B4-BE49-F238E27FC236}">
+                <a16:creationId xmlns:a16="http://schemas.microsoft.com/office/drawing/2014/main" id="{BEB1B86D-ECBF-E094-DF7B-CCFB61227DC0}"/>
+              </a:ext>
+            </a:extLst>
+          </p:cNvPr>
+          <p:cNvPicPr>
+            <a:picLocks noChangeAspect="1"/>
+          </p:cNvPicPr>
+          <p:nvPr/>
+        </p:nvPicPr>
+        <p:blipFill>
+          <a:blip r:embed="rId3"/>
+          <a:stretch>
+            <a:fillRect/>
+          </a:stretch>
+        </p:blipFill>
+        <p:spPr>
+          <a:xfrm>
+            <a:off x="0" y="616416"/>
+            <a:ext cx="6981092" cy="3445886"/>
+          </a:xfrm>
+          <a:prstGeom prst="rect">
+            <a:avLst/>
+          </a:prstGeom>
+        </p:spPr>
+      </p:pic>
+      <p:pic>
+        <p:nvPicPr>
+          <p:cNvPr id="22" name="Resim 21">
+            <a:extLst>
+              <a:ext uri="{FF2B5EF4-FFF2-40B4-BE49-F238E27FC236}">
+                <a16:creationId xmlns:a16="http://schemas.microsoft.com/office/drawing/2014/main" id="{AA80ECD9-9684-6811-E1AA-344C20153148}"/>
+              </a:ext>
+            </a:extLst>
+          </p:cNvPr>
+          <p:cNvPicPr>
+            <a:picLocks noChangeAspect="1"/>
+          </p:cNvPicPr>
+          <p:nvPr/>
+        </p:nvPicPr>
+        <p:blipFill>
+          <a:blip r:embed="rId4"/>
+          <a:stretch>
+            <a:fillRect/>
+          </a:stretch>
+        </p:blipFill>
+        <p:spPr>
+          <a:xfrm>
+            <a:off x="0" y="3991254"/>
+            <a:ext cx="6981092" cy="2866746"/>
+          </a:xfrm>
+          <a:prstGeom prst="rect">
+            <a:avLst/>
+          </a:prstGeom>
+        </p:spPr>
+      </p:pic>
     </p:spTree>
   </p:cSld>
   <p:clrMapOvr>
@@ -4626,7 +3172,18 @@
                 <a:ea typeface="Calibri" pitchFamily="34" charset="-122"/>
                 <a:cs typeface="Calibri" pitchFamily="34" charset="-120"/>
               </a:rPr>
-              <a:t>Bulgular, Kısıtlar ve Final Karar</a:t>
+              <a:t>Bulgular, Kısıtlar ve Final </a:t>
+            </a:r>
+            <a:r>
+              <a:rPr lang="tr-TR" sz="2800" b="1" dirty="0">
+                <a:solidFill>
+                  <a:srgbClr val="FFFFFF"/>
+                </a:solidFill>
+                <a:latin typeface="Calibri" pitchFamily="34" charset="0"/>
+                <a:ea typeface="Calibri" pitchFamily="34" charset="-122"/>
+                <a:cs typeface="Calibri" pitchFamily="34" charset="-120"/>
+              </a:rPr>
+              <a:t>Sonuç</a:t>
             </a:r>
             <a:endParaRPr lang="en-US" sz="2800" dirty="0"/>
           </a:p>
@@ -4742,54 +3299,19 @@
           <a:bodyPr wrap="square" lIns="0" tIns="0" rIns="0" bIns="0" rtlCol="0" anchor="ctr"/>
           <a:lstStyle/>
           <a:p>
-            <a:pPr marL="0" indent="0" algn="l">
-              <a:buNone/>
-            </a:pPr>
-            <a:r>
-              <a:rPr lang="en-US" sz="1100" dirty="0">
-                <a:solidFill>
-                  <a:srgbClr val="CBD5E1"/>
-                </a:solidFill>
-                <a:latin typeface="Calibri" pitchFamily="34" charset="0"/>
-                <a:ea typeface="Calibri" pitchFamily="34" charset="-122"/>
-                <a:cs typeface="Calibri" pitchFamily="34" charset="-120"/>
-              </a:rPr>
-              <a:t>PHP_CWE-434'te </a:t>
-            </a:r>
-            <a:r>
-              <a:rPr lang="en-US" sz="1100" dirty="0" err="1">
-                <a:solidFill>
-                  <a:srgbClr val="CBD5E1"/>
-                </a:solidFill>
-                <a:latin typeface="Calibri" pitchFamily="34" charset="0"/>
-                <a:ea typeface="Calibri" pitchFamily="34" charset="-122"/>
-                <a:cs typeface="Calibri" pitchFamily="34" charset="-120"/>
-              </a:rPr>
-              <a:t>anomali</a:t>
-            </a:r>
-            <a:r>
-              <a:rPr lang="en-US" sz="1100" dirty="0">
-                <a:solidFill>
-                  <a:srgbClr val="CBD5E1"/>
-                </a:solidFill>
-                <a:latin typeface="Calibri" pitchFamily="34" charset="0"/>
-                <a:ea typeface="Calibri" pitchFamily="34" charset="-122"/>
-                <a:cs typeface="Calibri" pitchFamily="34" charset="-120"/>
-              </a:rPr>
-              <a:t> </a:t>
-            </a:r>
-            <a:r>
-              <a:rPr lang="en-US" sz="1100" dirty="0" err="1">
-                <a:solidFill>
-                  <a:srgbClr val="CBD5E1"/>
-                </a:solidFill>
-                <a:latin typeface="Calibri" pitchFamily="34" charset="0"/>
-                <a:ea typeface="Calibri" pitchFamily="34" charset="-122"/>
-                <a:cs typeface="Calibri" pitchFamily="34" charset="-120"/>
-              </a:rPr>
-              <a:t>tespiti</a:t>
-            </a:r>
-            <a:endParaRPr lang="en-US" sz="1100" dirty="0"/>
+            <a:r>
+              <a:rPr lang="tr-TR" sz="1100" dirty="0">
+                <a:solidFill>
+                  <a:schemeClr val="bg1"/>
+                </a:solidFill>
+              </a:rPr>
+              <a:t>PHP_CWE-434 senaryosunda anomali tespiti başarılı</a:t>
+            </a:r>
+            <a:endParaRPr lang="en-US" sz="1100" dirty="0">
+              <a:solidFill>
+                <a:schemeClr val="bg1"/>
+              </a:solidFill>
+            </a:endParaRPr>
           </a:p>
         </p:txBody>
       </p:sp>
@@ -4839,21 +3361,43 @@
           <a:bodyPr wrap="square" lIns="0" tIns="0" rIns="0" bIns="0" rtlCol="0" anchor="ctr"/>
           <a:lstStyle/>
           <a:p>
-            <a:pPr marL="0" indent="0" algn="l">
-              <a:buNone/>
-            </a:pPr>
-            <a:r>
-              <a:rPr lang="en-US" sz="1100" dirty="0">
-                <a:solidFill>
-                  <a:srgbClr val="CBD5E1"/>
-                </a:solidFill>
-                <a:latin typeface="Calibri" pitchFamily="34" charset="0"/>
-                <a:ea typeface="Calibri" pitchFamily="34" charset="-122"/>
-                <a:cs typeface="Calibri" pitchFamily="34" charset="-120"/>
-              </a:rPr>
-              <a:t>Trace-level eval: F1 0.94+</a:t>
-            </a:r>
-            <a:endParaRPr lang="en-US" sz="1100" dirty="0"/>
+            <a:r>
+              <a:rPr lang="tr-TR" sz="1100" dirty="0" err="1">
+                <a:solidFill>
+                  <a:schemeClr val="bg1"/>
+                </a:solidFill>
+              </a:rPr>
+              <a:t>Trace-level</a:t>
+            </a:r>
+            <a:r>
+              <a:rPr lang="tr-TR" sz="1100" dirty="0">
+                <a:solidFill>
+                  <a:schemeClr val="bg1"/>
+                </a:solidFill>
+              </a:rPr>
+              <a:t> değerlendirme, </a:t>
+            </a:r>
+            <a:r>
+              <a:rPr lang="tr-TR" sz="1100" dirty="0" err="1">
+                <a:solidFill>
+                  <a:schemeClr val="bg1"/>
+                </a:solidFill>
+              </a:rPr>
+              <a:t>window-level</a:t>
+            </a:r>
+            <a:r>
+              <a:rPr lang="tr-TR" sz="1100" dirty="0">
+                <a:solidFill>
+                  <a:schemeClr val="bg1"/>
+                </a:solidFill>
+              </a:rPr>
+              <a:t> yaklaşıma göre belirgin iyileşme sağladı</a:t>
+            </a:r>
+            <a:endParaRPr lang="en-US" sz="1100" dirty="0">
+              <a:solidFill>
+                <a:schemeClr val="bg1"/>
+              </a:solidFill>
+            </a:endParaRPr>
           </a:p>
         </p:txBody>
       </p:sp>
@@ -4909,7 +3453,7 @@
             <a:r>
               <a:rPr lang="en-US" sz="1100" dirty="0">
                 <a:solidFill>
-                  <a:srgbClr val="CBD5E1"/>
+                  <a:schemeClr val="bg1"/>
                 </a:solidFill>
                 <a:latin typeface="Calibri" pitchFamily="34" charset="0"/>
                 <a:ea typeface="Calibri" pitchFamily="34" charset="-122"/>
@@ -4917,7 +3461,11 @@
               </a:rPr>
               <a:t>LSTM Syscall: en dengeli model</a:t>
             </a:r>
-            <a:endParaRPr lang="en-US" sz="1100" dirty="0"/>
+            <a:endParaRPr lang="en-US" sz="1100" dirty="0">
+              <a:solidFill>
+                <a:schemeClr val="bg1"/>
+              </a:solidFill>
+            </a:endParaRPr>
           </a:p>
         </p:txBody>
       </p:sp>
@@ -4967,21 +3515,83 @@
           <a:bodyPr wrap="square" lIns="0" tIns="0" rIns="0" bIns="0" rtlCol="0" anchor="ctr"/>
           <a:lstStyle/>
           <a:p>
-            <a:pPr marL="0" indent="0" algn="l">
-              <a:buNone/>
-            </a:pPr>
-            <a:r>
-              <a:rPr lang="en-US" sz="1100" dirty="0">
-                <a:solidFill>
-                  <a:srgbClr val="CBD5E1"/>
-                </a:solidFill>
-                <a:latin typeface="Calibri" pitchFamily="34" charset="0"/>
-                <a:ea typeface="Calibri" pitchFamily="34" charset="-122"/>
-                <a:cs typeface="Calibri" pitchFamily="34" charset="-120"/>
-              </a:rPr>
-              <a:t>Context: recall kazanımı + ↑ FPR tradeoff</a:t>
-            </a:r>
-            <a:endParaRPr lang="en-US" sz="1100" dirty="0"/>
+            <a:r>
+              <a:rPr lang="tr-TR" sz="1100" dirty="0">
+                <a:solidFill>
+                  <a:schemeClr val="bg1"/>
+                </a:solidFill>
+              </a:rPr>
+              <a:t>LSTM </a:t>
+            </a:r>
+            <a:r>
+              <a:rPr lang="tr-TR" sz="1100" dirty="0" err="1">
+                <a:solidFill>
+                  <a:schemeClr val="bg1"/>
+                </a:solidFill>
+              </a:rPr>
+              <a:t>Context</a:t>
+            </a:r>
+            <a:r>
+              <a:rPr lang="tr-TR" sz="1100" dirty="0">
+                <a:solidFill>
+                  <a:schemeClr val="bg1"/>
+                </a:solidFill>
+              </a:rPr>
+              <a:t> </a:t>
+            </a:r>
+            <a:r>
+              <a:rPr lang="tr-TR" sz="1100" dirty="0" err="1">
+                <a:solidFill>
+                  <a:schemeClr val="bg1"/>
+                </a:solidFill>
+              </a:rPr>
+              <a:t>recall’ü</a:t>
+            </a:r>
+            <a:r>
+              <a:rPr lang="tr-TR" sz="1100" dirty="0">
+                <a:solidFill>
+                  <a:schemeClr val="bg1"/>
+                </a:solidFill>
+              </a:rPr>
+              <a:t> artırdı, ancak </a:t>
+            </a:r>
+            <a:r>
+              <a:rPr lang="tr-TR" sz="1100" dirty="0" err="1">
+                <a:solidFill>
+                  <a:schemeClr val="bg1"/>
+                </a:solidFill>
+              </a:rPr>
+              <a:t>false</a:t>
+            </a:r>
+            <a:r>
+              <a:rPr lang="tr-TR" sz="1100" dirty="0">
+                <a:solidFill>
+                  <a:schemeClr val="bg1"/>
+                </a:solidFill>
+              </a:rPr>
+              <a:t> </a:t>
+            </a:r>
+            <a:r>
+              <a:rPr lang="tr-TR" sz="1100" dirty="0" err="1">
+                <a:solidFill>
+                  <a:schemeClr val="bg1"/>
+                </a:solidFill>
+              </a:rPr>
+              <a:t>positive</a:t>
+            </a:r>
+            <a:r>
+              <a:rPr lang="tr-TR" sz="1100" dirty="0">
+                <a:solidFill>
+                  <a:schemeClr val="bg1"/>
+                </a:solidFill>
+              </a:rPr>
+              <a:t> oranı yükseldi</a:t>
+            </a:r>
+            <a:endParaRPr lang="en-US" sz="1100" dirty="0">
+              <a:solidFill>
+                <a:schemeClr val="bg1"/>
+              </a:solidFill>
+            </a:endParaRPr>
           </a:p>
         </p:txBody>
       </p:sp>
@@ -5031,21 +3641,19 @@
           <a:bodyPr wrap="square" lIns="0" tIns="0" rIns="0" bIns="0" rtlCol="0" anchor="ctr"/>
           <a:lstStyle/>
           <a:p>
-            <a:pPr marL="0" indent="0" algn="l">
-              <a:buNone/>
-            </a:pPr>
-            <a:r>
-              <a:rPr lang="en-US" sz="1100" dirty="0">
-                <a:solidFill>
-                  <a:srgbClr val="CBD5E1"/>
-                </a:solidFill>
-                <a:latin typeface="Calibri" pitchFamily="34" charset="0"/>
-                <a:ea typeface="Calibri" pitchFamily="34" charset="-122"/>
-                <a:cs typeface="Calibri" pitchFamily="34" charset="-120"/>
-              </a:rPr>
-              <a:t>AUC ≥ 0.99 tüm modellerde</a:t>
-            </a:r>
-            <a:endParaRPr lang="en-US" sz="1100" dirty="0"/>
+            <a:r>
+              <a:rPr lang="tr-TR" sz="1100" dirty="0">
+                <a:solidFill>
+                  <a:schemeClr val="bg1"/>
+                </a:solidFill>
+              </a:rPr>
+              <a:t>Tüm modellerde AUC &gt; 0.99</a:t>
+            </a:r>
+            <a:endParaRPr lang="en-US" sz="1100" dirty="0">
+              <a:solidFill>
+                <a:schemeClr val="bg1"/>
+              </a:solidFill>
+            </a:endParaRPr>
           </a:p>
         </p:txBody>
       </p:sp>
@@ -5165,15 +3773,85 @@
             <a:r>
               <a:rPr lang="en-US" sz="1100" dirty="0">
                 <a:solidFill>
-                  <a:srgbClr val="CBD5E1"/>
-                </a:solidFill>
-                <a:latin typeface="Calibri" pitchFamily="34" charset="0"/>
-                <a:ea typeface="Calibri" pitchFamily="34" charset="-122"/>
-                <a:cs typeface="Calibri" pitchFamily="34" charset="-120"/>
-              </a:rPr>
-              <a:t>Tek senaryo — genelleme argümanı zayıf</a:t>
-            </a:r>
-            <a:endParaRPr lang="en-US" sz="1100" dirty="0"/>
+                  <a:schemeClr val="bg1"/>
+                </a:solidFill>
+                <a:latin typeface="Calibri" pitchFamily="34" charset="0"/>
+                <a:ea typeface="Calibri" pitchFamily="34" charset="-122"/>
+                <a:cs typeface="Calibri" pitchFamily="34" charset="-120"/>
+              </a:rPr>
+              <a:t>Tek </a:t>
+            </a:r>
+            <a:r>
+              <a:rPr lang="en-US" sz="1100" dirty="0" err="1">
+                <a:solidFill>
+                  <a:schemeClr val="bg1"/>
+                </a:solidFill>
+                <a:latin typeface="Calibri" pitchFamily="34" charset="0"/>
+                <a:ea typeface="Calibri" pitchFamily="34" charset="-122"/>
+                <a:cs typeface="Calibri" pitchFamily="34" charset="-120"/>
+              </a:rPr>
+              <a:t>senaryo</a:t>
+            </a:r>
+            <a:r>
+              <a:rPr lang="tr-TR" sz="1100" dirty="0">
+                <a:solidFill>
+                  <a:schemeClr val="bg1"/>
+                </a:solidFill>
+                <a:latin typeface="Calibri" pitchFamily="34" charset="0"/>
+                <a:ea typeface="Calibri" pitchFamily="34" charset="-122"/>
+                <a:cs typeface="Calibri" pitchFamily="34" charset="-120"/>
+              </a:rPr>
+              <a:t>,</a:t>
+            </a:r>
+            <a:r>
+              <a:rPr lang="en-US" sz="1100" dirty="0">
+                <a:solidFill>
+                  <a:schemeClr val="bg1"/>
+                </a:solidFill>
+                <a:latin typeface="Calibri" pitchFamily="34" charset="0"/>
+                <a:ea typeface="Calibri" pitchFamily="34" charset="-122"/>
+                <a:cs typeface="Calibri" pitchFamily="34" charset="-120"/>
+              </a:rPr>
+              <a:t> </a:t>
+            </a:r>
+            <a:r>
+              <a:rPr lang="en-US" sz="1100" dirty="0" err="1">
+                <a:solidFill>
+                  <a:schemeClr val="bg1"/>
+                </a:solidFill>
+                <a:latin typeface="Calibri" pitchFamily="34" charset="0"/>
+                <a:ea typeface="Calibri" pitchFamily="34" charset="-122"/>
+                <a:cs typeface="Calibri" pitchFamily="34" charset="-120"/>
+              </a:rPr>
+              <a:t>genelleme</a:t>
+            </a:r>
+            <a:r>
+              <a:rPr lang="en-US" sz="1100" dirty="0">
+                <a:solidFill>
+                  <a:schemeClr val="bg1"/>
+                </a:solidFill>
+                <a:latin typeface="Calibri" pitchFamily="34" charset="0"/>
+                <a:ea typeface="Calibri" pitchFamily="34" charset="-122"/>
+                <a:cs typeface="Calibri" pitchFamily="34" charset="-120"/>
+              </a:rPr>
+              <a:t> </a:t>
+            </a:r>
+            <a:r>
+              <a:rPr lang="tr-TR" sz="1100" dirty="0">
+                <a:solidFill>
+                  <a:schemeClr val="bg1"/>
+                </a:solidFill>
+                <a:latin typeface="Calibri" pitchFamily="34" charset="0"/>
+                <a:ea typeface="Calibri" pitchFamily="34" charset="-122"/>
+                <a:cs typeface="Calibri" pitchFamily="34" charset="-120"/>
+              </a:rPr>
+              <a:t>sınırlı</a:t>
+            </a:r>
+            <a:endParaRPr lang="en-US" sz="1100" dirty="0">
+              <a:solidFill>
+                <a:schemeClr val="bg1"/>
+              </a:solidFill>
+            </a:endParaRPr>
           </a:p>
         </p:txBody>
       </p:sp>
@@ -5223,21 +3901,59 @@
           <a:bodyPr wrap="square" lIns="0" tIns="0" rIns="0" bIns="0" rtlCol="0" anchor="ctr"/>
           <a:lstStyle/>
           <a:p>
-            <a:pPr marL="0" indent="0" algn="l">
-              <a:buNone/>
-            </a:pPr>
-            <a:r>
-              <a:rPr lang="en-US" sz="1100" dirty="0">
-                <a:solidFill>
-                  <a:srgbClr val="CBD5E1"/>
-                </a:solidFill>
-                <a:latin typeface="Calibri" pitchFamily="34" charset="0"/>
-                <a:ea typeface="Calibri" pitchFamily="34" charset="-122"/>
-                <a:cs typeface="Calibri" pitchFamily="34" charset="-120"/>
-              </a:rPr>
-              <a:t>Küçük validation anomali seti (2 trace)</a:t>
-            </a:r>
-            <a:endParaRPr lang="en-US" sz="1100" dirty="0"/>
+            <a:r>
+              <a:rPr lang="tr-TR" sz="1100" dirty="0" err="1">
+                <a:solidFill>
+                  <a:schemeClr val="bg1"/>
+                </a:solidFill>
+              </a:rPr>
+              <a:t>Threshold</a:t>
+            </a:r>
+            <a:r>
+              <a:rPr lang="tr-TR" sz="1100" dirty="0">
+                <a:solidFill>
+                  <a:schemeClr val="bg1"/>
+                </a:solidFill>
+              </a:rPr>
+              <a:t> </a:t>
+            </a:r>
+            <a:r>
+              <a:rPr lang="tr-TR" sz="1100" dirty="0" err="1">
+                <a:solidFill>
+                  <a:schemeClr val="bg1"/>
+                </a:solidFill>
+              </a:rPr>
+              <a:t>calibration</a:t>
+            </a:r>
+            <a:r>
+              <a:rPr lang="tr-TR" sz="1100" dirty="0">
+                <a:solidFill>
+                  <a:schemeClr val="bg1"/>
+                </a:solidFill>
+              </a:rPr>
+              <a:t>, </a:t>
+            </a:r>
+            <a:r>
+              <a:rPr lang="tr-TR" sz="1100" dirty="0" err="1">
+                <a:solidFill>
+                  <a:schemeClr val="bg1"/>
+                </a:solidFill>
+              </a:rPr>
+              <a:t>validation</a:t>
+            </a:r>
+            <a:r>
+              <a:rPr lang="tr-TR" sz="1100" dirty="0">
+                <a:solidFill>
+                  <a:schemeClr val="bg1"/>
+                </a:solidFill>
+              </a:rPr>
+              <a:t> setinin küçüklüğüne duyarlıydı</a:t>
+            </a:r>
+            <a:endParaRPr lang="en-US" sz="1100" dirty="0">
+              <a:solidFill>
+                <a:schemeClr val="bg1"/>
+              </a:solidFill>
+            </a:endParaRPr>
           </a:p>
         </p:txBody>
       </p:sp>
@@ -5293,7 +4009,7 @@
             <a:r>
               <a:rPr lang="en-US" sz="1100" dirty="0">
                 <a:solidFill>
-                  <a:srgbClr val="CBD5E1"/>
+                  <a:schemeClr val="bg1"/>
                 </a:solidFill>
                 <a:latin typeface="Calibri" pitchFamily="34" charset="0"/>
                 <a:ea typeface="Calibri" pitchFamily="34" charset="-122"/>
@@ -5301,7 +4017,11 @@
               </a:rPr>
               <a:t>Offline trace-level değerlendirme</a:t>
             </a:r>
-            <a:endParaRPr lang="en-US" sz="1100" dirty="0"/>
+            <a:endParaRPr lang="en-US" sz="1100" dirty="0">
+              <a:solidFill>
+                <a:schemeClr val="bg1"/>
+              </a:solidFill>
+            </a:endParaRPr>
           </a:p>
         </p:txBody>
       </p:sp>
@@ -5421,7 +4141,7 @@
             <a:r>
               <a:rPr lang="en-US" sz="1100" dirty="0">
                 <a:solidFill>
-                  <a:srgbClr val="CBD5E1"/>
+                  <a:schemeClr val="bg1"/>
                 </a:solidFill>
                 <a:latin typeface="Calibri" pitchFamily="34" charset="0"/>
                 <a:ea typeface="Calibri" pitchFamily="34" charset="-122"/>
@@ -5429,7 +4149,11 @@
               </a:rPr>
               <a:t>Ek LID-DS senaryolarında doğrulama</a:t>
             </a:r>
-            <a:endParaRPr lang="en-US" sz="1100" dirty="0"/>
+            <a:endParaRPr lang="en-US" sz="1100" dirty="0">
+              <a:solidFill>
+                <a:schemeClr val="bg1"/>
+              </a:solidFill>
+            </a:endParaRPr>
           </a:p>
         </p:txBody>
       </p:sp>
@@ -5485,7 +4209,7 @@
             <a:r>
               <a:rPr lang="en-US" sz="1100" dirty="0">
                 <a:solidFill>
-                  <a:srgbClr val="CBD5E1"/>
+                  <a:schemeClr val="bg1"/>
                 </a:solidFill>
                 <a:latin typeface="Calibri" pitchFamily="34" charset="0"/>
                 <a:ea typeface="Calibri" pitchFamily="34" charset="-122"/>
@@ -5493,7 +4217,11 @@
               </a:rPr>
               <a:t>Gerçek zamanlı streaming tespit</a:t>
             </a:r>
-            <a:endParaRPr lang="en-US" sz="1100" dirty="0"/>
+            <a:endParaRPr lang="en-US" sz="1100" dirty="0">
+              <a:solidFill>
+                <a:schemeClr val="bg1"/>
+              </a:solidFill>
+            </a:endParaRPr>
           </a:p>
         </p:txBody>
       </p:sp>
@@ -5543,21 +4271,35 @@
           <a:bodyPr wrap="square" lIns="0" tIns="0" rIns="0" bIns="0" rtlCol="0" anchor="ctr"/>
           <a:lstStyle/>
           <a:p>
-            <a:pPr marL="0" indent="0" algn="l">
-              <a:buNone/>
-            </a:pPr>
-            <a:r>
-              <a:rPr lang="en-US" sz="1100" dirty="0">
-                <a:solidFill>
-                  <a:srgbClr val="CBD5E1"/>
-                </a:solidFill>
-                <a:latin typeface="Calibri" pitchFamily="34" charset="0"/>
-                <a:ea typeface="Calibri" pitchFamily="34" charset="-122"/>
-                <a:cs typeface="Calibri" pitchFamily="34" charset="-120"/>
-              </a:rPr>
-              <a:t>Multi-stream context mimarisi</a:t>
-            </a:r>
-            <a:endParaRPr lang="en-US" sz="1100" dirty="0"/>
+            <a:r>
+              <a:rPr lang="tr-TR" sz="1100" dirty="0">
+                <a:solidFill>
+                  <a:schemeClr val="bg1"/>
+                </a:solidFill>
+              </a:rPr>
+              <a:t>Daha gelişmiş </a:t>
+            </a:r>
+            <a:r>
+              <a:rPr lang="tr-TR" sz="1100" dirty="0" err="1">
+                <a:solidFill>
+                  <a:schemeClr val="bg1"/>
+                </a:solidFill>
+              </a:rPr>
+              <a:t>context</a:t>
+            </a:r>
+            <a:r>
+              <a:rPr lang="tr-TR" sz="1100" dirty="0">
+                <a:solidFill>
+                  <a:schemeClr val="bg1"/>
+                </a:solidFill>
+              </a:rPr>
+              <a:t> temsilleri</a:t>
+            </a:r>
+            <a:endParaRPr lang="en-US" sz="1100" dirty="0">
+              <a:solidFill>
+                <a:schemeClr val="bg1"/>
+              </a:solidFill>
+            </a:endParaRPr>
           </a:p>
         </p:txBody>
       </p:sp>
@@ -5607,21 +4349,297 @@
           <a:bodyPr wrap="square" lIns="0" tIns="0" rIns="0" bIns="0" rtlCol="0" anchor="ctr"/>
           <a:lstStyle/>
           <a:p>
+            <a:r>
+              <a:rPr lang="tr-TR" sz="1100" dirty="0">
+                <a:solidFill>
+                  <a:schemeClr val="bg1"/>
+                </a:solidFill>
+              </a:rPr>
+              <a:t>Daha açıklanabilir ve </a:t>
+            </a:r>
+            <a:r>
+              <a:rPr lang="tr-TR" sz="1100" dirty="0" err="1">
+                <a:solidFill>
+                  <a:schemeClr val="bg1"/>
+                </a:solidFill>
+              </a:rPr>
+              <a:t>deploy</a:t>
+            </a:r>
+            <a:r>
+              <a:rPr lang="tr-TR" sz="1100" dirty="0">
+                <a:solidFill>
+                  <a:schemeClr val="bg1"/>
+                </a:solidFill>
+              </a:rPr>
+              <a:t> edilebilir sistem tasarımı</a:t>
+            </a:r>
+            <a:endParaRPr lang="en-US" sz="1100" dirty="0">
+              <a:solidFill>
+                <a:schemeClr val="bg1"/>
+              </a:solidFill>
+            </a:endParaRPr>
+          </a:p>
+        </p:txBody>
+      </p:sp>
+      <p:sp>
+        <p:nvSpPr>
+          <p:cNvPr id="24" name="Metin kutusu 23">
+            <a:extLst>
+              <a:ext uri="{FF2B5EF4-FFF2-40B4-BE49-F238E27FC236}">
+                <a16:creationId xmlns:a16="http://schemas.microsoft.com/office/drawing/2014/main" id="{64EF60F9-9A92-0AB2-FFE8-556F4C7D93E8}"/>
+              </a:ext>
+            </a:extLst>
+          </p:cNvPr>
+          <p:cNvSpPr txBox="1"/>
+          <p:nvPr/>
+        </p:nvSpPr>
+        <p:spPr>
+          <a:xfrm>
+            <a:off x="1121165" y="5168030"/>
+            <a:ext cx="9919189" cy="1323439"/>
+          </a:xfrm>
+          <a:prstGeom prst="rect">
+            <a:avLst/>
+          </a:prstGeom>
+          <a:noFill/>
+        </p:spPr>
+        <p:txBody>
+          <a:bodyPr wrap="square" rtlCol="0">
+            <a:spAutoFit/>
+          </a:bodyPr>
+          <a:lstStyle/>
+          <a:p>
+            <a:r>
+              <a:rPr lang="tr-TR" sz="1600" b="1" dirty="0">
+                <a:solidFill>
+                  <a:schemeClr val="bg1"/>
+                </a:solidFill>
+              </a:rPr>
+              <a:t>Final Sonuç:</a:t>
+            </a:r>
+            <a:br>
+              <a:rPr lang="tr-TR" sz="1600" dirty="0">
+                <a:solidFill>
+                  <a:schemeClr val="bg1"/>
+                </a:solidFill>
+              </a:rPr>
+            </a:br>
+            <a:r>
+              <a:rPr lang="tr-TR" sz="1600" dirty="0">
+                <a:solidFill>
+                  <a:schemeClr val="bg1"/>
+                </a:solidFill>
+              </a:rPr>
+              <a:t>Bu senaryoda, öğrenilmiş normal </a:t>
+            </a:r>
+            <a:r>
+              <a:rPr lang="tr-TR" sz="1600" dirty="0" err="1">
+                <a:solidFill>
+                  <a:schemeClr val="bg1"/>
+                </a:solidFill>
+              </a:rPr>
+              <a:t>syscall</a:t>
+            </a:r>
+            <a:r>
+              <a:rPr lang="tr-TR" sz="1600" dirty="0">
+                <a:solidFill>
+                  <a:schemeClr val="bg1"/>
+                </a:solidFill>
+              </a:rPr>
+              <a:t> örüntülerinden </a:t>
+            </a:r>
+            <a:r>
+              <a:rPr lang="tr-TR" sz="1600" dirty="0" err="1">
+                <a:solidFill>
+                  <a:schemeClr val="bg1"/>
+                </a:solidFill>
+              </a:rPr>
+              <a:t>anomalik</a:t>
+            </a:r>
+            <a:r>
+              <a:rPr lang="tr-TR" sz="1600" dirty="0">
+                <a:solidFill>
+                  <a:schemeClr val="bg1"/>
+                </a:solidFill>
+              </a:rPr>
+              <a:t> Linux </a:t>
+            </a:r>
+            <a:r>
+              <a:rPr lang="tr-TR" sz="1600" dirty="0" err="1">
+                <a:solidFill>
+                  <a:schemeClr val="bg1"/>
+                </a:solidFill>
+              </a:rPr>
+              <a:t>process</a:t>
+            </a:r>
+            <a:r>
+              <a:rPr lang="tr-TR" sz="1600" dirty="0">
+                <a:solidFill>
+                  <a:schemeClr val="bg1"/>
+                </a:solidFill>
+              </a:rPr>
+              <a:t> davranışı başarılı biçimde ayrıştırıldı. Ana model olarak, tespit gücü ile yanlış alarm kontrolü arasındaki dengesi nedeniyle LSTM </a:t>
+            </a:r>
+            <a:r>
+              <a:rPr lang="tr-TR" sz="1600" dirty="0" err="1">
+                <a:solidFill>
+                  <a:schemeClr val="bg1"/>
+                </a:solidFill>
+              </a:rPr>
+              <a:t>Syscall</a:t>
+            </a:r>
+            <a:r>
+              <a:rPr lang="tr-TR" sz="1600" dirty="0">
+                <a:solidFill>
+                  <a:schemeClr val="bg1"/>
+                </a:solidFill>
+              </a:rPr>
+              <a:t> seçildi. </a:t>
+            </a:r>
+            <a:r>
+              <a:rPr lang="tr-TR" sz="1600" dirty="0" err="1">
+                <a:solidFill>
+                  <a:schemeClr val="bg1"/>
+                </a:solidFill>
+              </a:rPr>
+              <a:t>STIDE’ın</a:t>
+            </a:r>
+            <a:r>
+              <a:rPr lang="tr-TR" sz="1600" dirty="0">
+                <a:solidFill>
+                  <a:schemeClr val="bg1"/>
+                </a:solidFill>
+              </a:rPr>
+              <a:t> eski bir yöntem olmasına rağmen güçlü bir </a:t>
+            </a:r>
+            <a:r>
+              <a:rPr lang="tr-TR" sz="1600" dirty="0" err="1">
+                <a:solidFill>
+                  <a:schemeClr val="bg1"/>
+                </a:solidFill>
+              </a:rPr>
+              <a:t>baseline</a:t>
+            </a:r>
+            <a:r>
+              <a:rPr lang="tr-TR" sz="1600" dirty="0">
+                <a:solidFill>
+                  <a:schemeClr val="bg1"/>
+                </a:solidFill>
+              </a:rPr>
+              <a:t> olduğu görüldü. </a:t>
+            </a:r>
+            <a:r>
+              <a:rPr lang="tr-TR" sz="1600" dirty="0" err="1">
+                <a:solidFill>
+                  <a:schemeClr val="bg1"/>
+                </a:solidFill>
+              </a:rPr>
+              <a:t>Recall</a:t>
+            </a:r>
+            <a:r>
+              <a:rPr lang="tr-TR" sz="1600" dirty="0">
+                <a:solidFill>
+                  <a:schemeClr val="bg1"/>
+                </a:solidFill>
+              </a:rPr>
+              <a:t> öncelikli kullanım senaryolarında ise LSTM </a:t>
+            </a:r>
+            <a:r>
+              <a:rPr lang="tr-TR" sz="1600" dirty="0" err="1">
+                <a:solidFill>
+                  <a:schemeClr val="bg1"/>
+                </a:solidFill>
+              </a:rPr>
+              <a:t>Context</a:t>
+            </a:r>
+            <a:r>
+              <a:rPr lang="tr-TR" sz="1600" dirty="0">
+                <a:solidFill>
+                  <a:schemeClr val="bg1"/>
+                </a:solidFill>
+              </a:rPr>
+              <a:t> modeli öne çıktı.</a:t>
+            </a:r>
+          </a:p>
+        </p:txBody>
+      </p:sp>
+      <p:sp>
+        <p:nvSpPr>
+          <p:cNvPr id="26" name="Shape 20">
+            <a:extLst>
+              <a:ext uri="{FF2B5EF4-FFF2-40B4-BE49-F238E27FC236}">
+                <a16:creationId xmlns:a16="http://schemas.microsoft.com/office/drawing/2014/main" id="{EB66DBFF-9A35-73BA-292F-6DD87054FAE0}"/>
+              </a:ext>
+            </a:extLst>
+          </p:cNvPr>
+          <p:cNvSpPr/>
+          <p:nvPr/>
+        </p:nvSpPr>
+        <p:spPr>
+          <a:xfrm>
+            <a:off x="4485132" y="3665454"/>
+            <a:ext cx="182880" cy="182880"/>
+          </a:xfrm>
+          <a:prstGeom prst="ellipse">
+            <a:avLst/>
+          </a:prstGeom>
+          <a:solidFill>
+            <a:srgbClr val="F59E0B"/>
+          </a:solidFill>
+          <a:ln w="12700">
+            <a:solidFill>
+              <a:srgbClr val="F59E0B"/>
+            </a:solidFill>
+            <a:prstDash val="solid"/>
+          </a:ln>
+        </p:spPr>
+      </p:sp>
+      <p:sp>
+        <p:nvSpPr>
+          <p:cNvPr id="27" name="Text 21">
+            <a:extLst>
+              <a:ext uri="{FF2B5EF4-FFF2-40B4-BE49-F238E27FC236}">
+                <a16:creationId xmlns:a16="http://schemas.microsoft.com/office/drawing/2014/main" id="{B519702F-43AB-1EA8-A829-EF9DCAA91476}"/>
+              </a:ext>
+            </a:extLst>
+          </p:cNvPr>
+          <p:cNvSpPr/>
+          <p:nvPr/>
+        </p:nvSpPr>
+        <p:spPr>
+          <a:xfrm>
+            <a:off x="4777740" y="3610590"/>
+            <a:ext cx="2971800" cy="475488"/>
+          </a:xfrm>
+          <a:prstGeom prst="rect">
+            <a:avLst/>
+          </a:prstGeom>
+          <a:noFill/>
+          <a:ln/>
+        </p:spPr>
+        <p:txBody>
+          <a:bodyPr wrap="square" lIns="0" tIns="0" rIns="0" bIns="0" rtlCol="0" anchor="ctr"/>
+          <a:lstStyle/>
+          <a:p>
             <a:pPr marL="0" indent="0" algn="l">
               <a:buNone/>
             </a:pPr>
             <a:r>
-              <a:rPr lang="en-US" sz="1100" dirty="0">
-                <a:solidFill>
-                  <a:srgbClr val="CBD5E1"/>
-                </a:solidFill>
-                <a:latin typeface="Calibri" pitchFamily="34" charset="0"/>
-                <a:ea typeface="Calibri" pitchFamily="34" charset="-122"/>
-                <a:cs typeface="Calibri" pitchFamily="34" charset="-120"/>
-              </a:rPr>
-              <a:t>Daha güçlü threshold kalibrasyonu</a:t>
-            </a:r>
-            <a:endParaRPr lang="en-US" sz="1100" dirty="0"/>
+              <a:rPr lang="tr-TR" sz="1100" dirty="0">
+                <a:solidFill>
+                  <a:schemeClr val="bg1"/>
+                </a:solidFill>
+                <a:latin typeface="Calibri" pitchFamily="34" charset="0"/>
+                <a:ea typeface="Calibri" pitchFamily="34" charset="-122"/>
+                <a:cs typeface="Calibri" pitchFamily="34" charset="-120"/>
+              </a:rPr>
+              <a:t>Kısıtlı zaman</a:t>
+            </a:r>
+            <a:endParaRPr lang="en-US" sz="1100" dirty="0">
+              <a:solidFill>
+                <a:schemeClr val="bg1"/>
+              </a:solidFill>
+            </a:endParaRPr>
           </a:p>
         </p:txBody>
       </p:sp>
@@ -6235,7 +5253,7 @@
       </p:sp>
       <p:sp>
         <p:nvSpPr>
-          <p:cNvPr id="4" name="Shape 2"/>
+          <p:cNvPr id="5" name="Text 3"/>
           <p:cNvSpPr/>
           <p:nvPr/>
         </p:nvSpPr>
@@ -6244,31 +5262,6 @@
             <a:off x="457200" y="1399032"/>
             <a:ext cx="530352" cy="530352"/>
           </a:xfrm>
-          <a:prstGeom prst="ellipse">
-            <a:avLst/>
-          </a:prstGeom>
-          <a:solidFill>
-            <a:srgbClr val="0D9488"/>
-          </a:solidFill>
-          <a:ln w="12700">
-            <a:solidFill>
-              <a:srgbClr val="0D9488"/>
-            </a:solidFill>
-            <a:prstDash val="solid"/>
-          </a:ln>
-        </p:spPr>
-      </p:sp>
-      <p:sp>
-        <p:nvSpPr>
-          <p:cNvPr id="5" name="Text 3"/>
-          <p:cNvSpPr/>
-          <p:nvPr/>
-        </p:nvSpPr>
-        <p:spPr>
-          <a:xfrm>
-            <a:off x="457200" y="1399032"/>
-            <a:ext cx="530352" cy="530352"/>
-          </a:xfrm>
           <a:prstGeom prst="rect">
             <a:avLst/>
           </a:prstGeom>
@@ -6283,17 +5276,14 @@
               <a:buNone/>
             </a:pPr>
             <a:r>
-              <a:rPr lang="en-US" sz="1200" b="1" dirty="0">
-                <a:solidFill>
-                  <a:srgbClr val="FFFFFF"/>
-                </a:solidFill>
-                <a:latin typeface="Calibri" pitchFamily="34" charset="0"/>
-                <a:ea typeface="Calibri" pitchFamily="34" charset="-122"/>
-                <a:cs typeface="Calibri" pitchFamily="34" charset="-120"/>
-              </a:rPr>
-              <a:t>01</a:t>
-            </a:r>
-            <a:endParaRPr lang="en-US" sz="1200" dirty="0"/>
+              <a:rPr lang="en-US" b="1" dirty="0">
+                <a:latin typeface="Calibri" pitchFamily="34" charset="0"/>
+                <a:ea typeface="Calibri" pitchFamily="34" charset="-122"/>
+                <a:cs typeface="Calibri" pitchFamily="34" charset="-120"/>
+              </a:rPr>
+              <a:t>1</a:t>
+            </a:r>
+            <a:endParaRPr lang="en-US" dirty="0"/>
           </a:p>
         </p:txBody>
       </p:sp>
@@ -6377,7 +5367,7 @@
       </p:sp>
       <p:sp>
         <p:nvSpPr>
-          <p:cNvPr id="8" name="Shape 6"/>
+          <p:cNvPr id="9" name="Text 7"/>
           <p:cNvSpPr/>
           <p:nvPr/>
         </p:nvSpPr>
@@ -6386,31 +5376,6 @@
             <a:off x="457200" y="2770632"/>
             <a:ext cx="530352" cy="530352"/>
           </a:xfrm>
-          <a:prstGeom prst="ellipse">
-            <a:avLst/>
-          </a:prstGeom>
-          <a:solidFill>
-            <a:srgbClr val="0D9488"/>
-          </a:solidFill>
-          <a:ln w="12700">
-            <a:solidFill>
-              <a:srgbClr val="0D9488"/>
-            </a:solidFill>
-            <a:prstDash val="solid"/>
-          </a:ln>
-        </p:spPr>
-      </p:sp>
-      <p:sp>
-        <p:nvSpPr>
-          <p:cNvPr id="9" name="Text 7"/>
-          <p:cNvSpPr/>
-          <p:nvPr/>
-        </p:nvSpPr>
-        <p:spPr>
-          <a:xfrm>
-            <a:off x="457200" y="2770632"/>
-            <a:ext cx="530352" cy="530352"/>
-          </a:xfrm>
           <a:prstGeom prst="rect">
             <a:avLst/>
           </a:prstGeom>
@@ -6425,17 +5390,14 @@
               <a:buNone/>
             </a:pPr>
             <a:r>
-              <a:rPr lang="en-US" sz="1200" b="1" dirty="0">
-                <a:solidFill>
-                  <a:srgbClr val="FFFFFF"/>
-                </a:solidFill>
-                <a:latin typeface="Calibri" pitchFamily="34" charset="0"/>
-                <a:ea typeface="Calibri" pitchFamily="34" charset="-122"/>
-                <a:cs typeface="Calibri" pitchFamily="34" charset="-120"/>
-              </a:rPr>
-              <a:t>02</a:t>
-            </a:r>
-            <a:endParaRPr lang="en-US" sz="1200" dirty="0"/>
+              <a:rPr lang="en-US" b="1" dirty="0">
+                <a:latin typeface="Calibri" pitchFamily="34" charset="0"/>
+                <a:ea typeface="Calibri" pitchFamily="34" charset="-122"/>
+                <a:cs typeface="Calibri" pitchFamily="34" charset="-120"/>
+              </a:rPr>
+              <a:t>2</a:t>
+            </a:r>
+            <a:endParaRPr lang="en-US" dirty="0"/>
           </a:p>
         </p:txBody>
       </p:sp>
@@ -6511,70 +5473,8 @@
           <a:lstStyle/>
           <a:p>
             <a:r>
-              <a:rPr lang="en-US" sz="1100" dirty="0">
-                <a:solidFill>
-                  <a:srgbClr val="334155"/>
-                </a:solidFill>
-                <a:latin typeface="Calibri" pitchFamily="34" charset="0"/>
-                <a:ea typeface="Calibri" pitchFamily="34" charset="-122"/>
-                <a:cs typeface="Calibri" pitchFamily="34" charset="-120"/>
-              </a:rPr>
-              <a:t>Kural</a:t>
-            </a:r>
-            <a:r>
-              <a:rPr lang="tr-TR" sz="1100" dirty="0">
-                <a:solidFill>
-                  <a:srgbClr val="334155"/>
-                </a:solidFill>
-                <a:latin typeface="Calibri" pitchFamily="34" charset="0"/>
-                <a:ea typeface="Calibri" pitchFamily="34" charset="-122"/>
-                <a:cs typeface="Calibri" pitchFamily="34" charset="-120"/>
-              </a:rPr>
-              <a:t> </a:t>
-            </a:r>
-            <a:r>
-              <a:rPr lang="en-US" sz="1100" dirty="0" err="1">
-                <a:solidFill>
-                  <a:srgbClr val="1E2D40"/>
-                </a:solidFill>
-                <a:latin typeface="Calibri" pitchFamily="34" charset="0"/>
-                <a:ea typeface="Calibri" pitchFamily="34" charset="-122"/>
-                <a:cs typeface="Calibri" pitchFamily="34" charset="-120"/>
-              </a:rPr>
-              <a:t>tabanlı</a:t>
-            </a:r>
-            <a:r>
-              <a:rPr lang="en-US" sz="1100" dirty="0">
-                <a:solidFill>
-                  <a:srgbClr val="334155"/>
-                </a:solidFill>
-                <a:latin typeface="Calibri" pitchFamily="34" charset="0"/>
-                <a:ea typeface="Calibri" pitchFamily="34" charset="-122"/>
-                <a:cs typeface="Calibri" pitchFamily="34" charset="-120"/>
-              </a:rPr>
-              <a:t> </a:t>
-            </a:r>
-            <a:r>
-              <a:rPr lang="en-US" sz="1100" dirty="0" err="1">
-                <a:solidFill>
-                  <a:srgbClr val="334155"/>
-                </a:solidFill>
-                <a:latin typeface="Calibri" pitchFamily="34" charset="0"/>
-                <a:ea typeface="Calibri" pitchFamily="34" charset="-122"/>
-                <a:cs typeface="Calibri" pitchFamily="34" charset="-120"/>
-              </a:rPr>
-              <a:t>sistemler</a:t>
-            </a:r>
-            <a:r>
-              <a:rPr lang="en-US" sz="1100" dirty="0">
-                <a:solidFill>
-                  <a:srgbClr val="334155"/>
-                </a:solidFill>
-                <a:latin typeface="Calibri" pitchFamily="34" charset="0"/>
-                <a:ea typeface="Calibri" pitchFamily="34" charset="-122"/>
-                <a:cs typeface="Calibri" pitchFamily="34" charset="-120"/>
-              </a:rPr>
-              <a:t> bilinmeyen veya varyant saldırıları yakalayamaz. Yeni saldırı tiplerini öğrenemiyor.</a:t>
+              <a:rPr lang="tr-TR" sz="1100" dirty="0"/>
+              <a:t>Kural tabanlı sistemler bilinmeyen veya varyant saldırıları genellikle yakalayamaz.</a:t>
             </a:r>
             <a:endParaRPr lang="en-US" sz="1100" dirty="0"/>
           </a:p>
@@ -6582,7 +5482,7 @@
       </p:sp>
       <p:sp>
         <p:nvSpPr>
-          <p:cNvPr id="12" name="Shape 10"/>
+          <p:cNvPr id="13" name="Text 11"/>
           <p:cNvSpPr/>
           <p:nvPr/>
         </p:nvSpPr>
@@ -6591,31 +5491,6 @@
             <a:off x="457200" y="4142232"/>
             <a:ext cx="530352" cy="530352"/>
           </a:xfrm>
-          <a:prstGeom prst="ellipse">
-            <a:avLst/>
-          </a:prstGeom>
-          <a:solidFill>
-            <a:srgbClr val="0D9488"/>
-          </a:solidFill>
-          <a:ln w="12700">
-            <a:solidFill>
-              <a:srgbClr val="0D9488"/>
-            </a:solidFill>
-            <a:prstDash val="solid"/>
-          </a:ln>
-        </p:spPr>
-      </p:sp>
-      <p:sp>
-        <p:nvSpPr>
-          <p:cNvPr id="13" name="Text 11"/>
-          <p:cNvSpPr/>
-          <p:nvPr/>
-        </p:nvSpPr>
-        <p:spPr>
-          <a:xfrm>
-            <a:off x="457200" y="4142232"/>
-            <a:ext cx="530352" cy="530352"/>
-          </a:xfrm>
           <a:prstGeom prst="rect">
             <a:avLst/>
           </a:prstGeom>
@@ -6630,17 +5505,14 @@
               <a:buNone/>
             </a:pPr>
             <a:r>
-              <a:rPr lang="en-US" sz="1200" b="1" dirty="0">
-                <a:solidFill>
-                  <a:srgbClr val="FFFFFF"/>
-                </a:solidFill>
-                <a:latin typeface="Calibri" pitchFamily="34" charset="0"/>
-                <a:ea typeface="Calibri" pitchFamily="34" charset="-122"/>
-                <a:cs typeface="Calibri" pitchFamily="34" charset="-120"/>
-              </a:rPr>
-              <a:t>03</a:t>
-            </a:r>
-            <a:endParaRPr lang="en-US" sz="1200" dirty="0"/>
+              <a:rPr lang="en-US" b="1" dirty="0">
+                <a:latin typeface="Calibri" pitchFamily="34" charset="0"/>
+                <a:ea typeface="Calibri" pitchFamily="34" charset="-122"/>
+                <a:cs typeface="Calibri" pitchFamily="34" charset="-120"/>
+              </a:rPr>
+              <a:t>3</a:t>
+            </a:r>
+            <a:endParaRPr lang="en-US" dirty="0"/>
           </a:p>
         </p:txBody>
       </p:sp>
@@ -6704,19 +5576,41 @@
           <a:bodyPr wrap="square" lIns="0" tIns="0" rIns="0" bIns="0" rtlCol="0" anchor="t"/>
           <a:lstStyle/>
           <a:p>
-            <a:pPr marL="0" indent="0" algn="l">
-              <a:buNone/>
-            </a:pPr>
-            <a:r>
-              <a:rPr lang="en-US" sz="1100" dirty="0">
-                <a:solidFill>
-                  <a:srgbClr val="334155"/>
-                </a:solidFill>
-                <a:latin typeface="Calibri" pitchFamily="34" charset="0"/>
-                <a:ea typeface="Calibri" pitchFamily="34" charset="-122"/>
-                <a:cs typeface="Calibri" pitchFamily="34" charset="-120"/>
-              </a:rPr>
-              <a:t>Her process kernel ile yalnızca syscall'lar üzerinden iletişim kurar — normal davranışın parmak izi buradadır.</a:t>
+            <a:r>
+              <a:rPr lang="tr-TR" sz="1100" dirty="0"/>
+              <a:t>Her </a:t>
+            </a:r>
+            <a:r>
+              <a:rPr lang="tr-TR" sz="1100" dirty="0" err="1"/>
+              <a:t>process</a:t>
+            </a:r>
+            <a:r>
+              <a:rPr lang="tr-TR" sz="1100" dirty="0"/>
+              <a:t> </a:t>
+            </a:r>
+            <a:r>
+              <a:rPr lang="tr-TR" sz="1100" dirty="0" err="1"/>
+              <a:t>kernel</a:t>
+            </a:r>
+            <a:r>
+              <a:rPr lang="tr-TR" sz="1100" dirty="0"/>
+              <a:t> ile yalnızca </a:t>
+            </a:r>
+            <a:r>
+              <a:rPr lang="tr-TR" sz="1100" dirty="0" err="1"/>
+              <a:t>system</a:t>
+            </a:r>
+            <a:r>
+              <a:rPr lang="tr-TR" sz="1100" dirty="0"/>
+              <a:t> </a:t>
+            </a:r>
+            <a:r>
+              <a:rPr lang="tr-TR" sz="1100" dirty="0" err="1"/>
+              <a:t>call’lar</a:t>
+            </a:r>
+            <a:r>
+              <a:rPr lang="tr-TR" sz="1100" dirty="0"/>
+              <a:t> üzerinden iletişim kurar. Bu nedenle normal davranışın en doğrudan izlerinden biri burada oluşur.</a:t>
             </a:r>
             <a:endParaRPr lang="en-US" sz="1100" dirty="0"/>
           </a:p>
@@ -7260,6 +6154,13 @@
             <a:prstDash val="solid"/>
           </a:ln>
         </p:spPr>
+        <p:txBody>
+          <a:bodyPr/>
+          <a:lstStyle/>
+          <a:p>
+            <a:endParaRPr lang="tr-TR" dirty="0"/>
+          </a:p>
+        </p:txBody>
       </p:sp>
       <p:sp>
         <p:nvSpPr>
@@ -7347,8 +6248,8 @@
         </p:nvSpPr>
         <p:spPr>
           <a:xfrm>
-            <a:off x="713232" y="2231136"/>
-            <a:ext cx="3200400" cy="365760"/>
+            <a:off x="713232" y="2116836"/>
+            <a:ext cx="3413760" cy="553212"/>
           </a:xfrm>
           <a:prstGeom prst="rect">
             <a:avLst/>
@@ -7360,9 +6261,17 @@
           <a:bodyPr wrap="square" lIns="0" tIns="0" rIns="0" bIns="0" rtlCol="0" anchor="t"/>
           <a:lstStyle/>
           <a:p>
-            <a:pPr marL="0" indent="0" algn="l">
-              <a:buNone/>
-            </a:pPr>
+            <a:r>
+              <a:rPr lang="tr-TR" sz="1100" dirty="0" err="1">
+                <a:solidFill>
+                  <a:srgbClr val="64748B"/>
+                </a:solidFill>
+                <a:latin typeface="Calibri" pitchFamily="34" charset="0"/>
+                <a:ea typeface="Calibri" pitchFamily="34" charset="-122"/>
+                <a:cs typeface="Calibri" pitchFamily="34" charset="-120"/>
+              </a:rPr>
+              <a:t>Liepzig</a:t>
+            </a:r>
             <a:r>
               <a:rPr lang="en-US" sz="1100" dirty="0">
                 <a:solidFill>
@@ -7372,9 +6281,75 @@
                 <a:ea typeface="Calibri" pitchFamily="34" charset="-122"/>
                 <a:cs typeface="Calibri" pitchFamily="34" charset="-120"/>
               </a:rPr>
-              <a:t>Linux Intrusion Detection Dataset</a:t>
-            </a:r>
-            <a:endParaRPr lang="en-US" sz="1100" dirty="0"/>
+              <a:t> Intrusion Detection Dataset</a:t>
+            </a:r>
+            <a:br>
+              <a:rPr lang="tr-TR" sz="1100" dirty="0">
+                <a:solidFill>
+                  <a:srgbClr val="64748B"/>
+                </a:solidFill>
+                <a:latin typeface="Calibri" pitchFamily="34" charset="0"/>
+                <a:ea typeface="Calibri" pitchFamily="34" charset="-122"/>
+                <a:cs typeface="Calibri" pitchFamily="34" charset="-120"/>
+              </a:rPr>
+            </a:br>
+            <a:r>
+              <a:rPr lang="tr-TR" sz="1100" dirty="0" err="1">
+                <a:solidFill>
+                  <a:schemeClr val="accent3">
+                    <a:lumMod val="75000"/>
+                  </a:schemeClr>
+                </a:solidFill>
+              </a:rPr>
+              <a:t>Dataset</a:t>
+            </a:r>
+            <a:r>
+              <a:rPr lang="tr-TR" sz="1100" dirty="0">
+                <a:solidFill>
+                  <a:schemeClr val="accent3">
+                    <a:lumMod val="75000"/>
+                  </a:schemeClr>
+                </a:solidFill>
+              </a:rPr>
+              <a:t> reference: </a:t>
+            </a:r>
+            <a:r>
+              <a:rPr lang="tr-TR" sz="1100" dirty="0" err="1">
+                <a:solidFill>
+                  <a:schemeClr val="accent3">
+                    <a:lumMod val="75000"/>
+                  </a:schemeClr>
+                </a:solidFill>
+              </a:rPr>
+              <a:t>Grimmer</a:t>
+            </a:r>
+            <a:r>
+              <a:rPr lang="tr-TR" sz="1100" dirty="0">
+                <a:solidFill>
+                  <a:schemeClr val="accent3">
+                    <a:lumMod val="75000"/>
+                  </a:schemeClr>
+                </a:solidFill>
+              </a:rPr>
+              <a:t> et al., 2023, Leipzig </a:t>
+            </a:r>
+            <a:r>
+              <a:rPr lang="tr-TR" sz="1100" dirty="0" err="1">
+                <a:solidFill>
+                  <a:schemeClr val="accent3">
+                    <a:lumMod val="75000"/>
+                  </a:schemeClr>
+                </a:solidFill>
+              </a:rPr>
+              <a:t>University</a:t>
+            </a:r>
+            <a:endParaRPr lang="en-US" sz="1100" dirty="0">
+              <a:solidFill>
+                <a:schemeClr val="accent3">
+                  <a:lumMod val="75000"/>
+                </a:schemeClr>
+              </a:solidFill>
+            </a:endParaRPr>
           </a:p>
         </p:txBody>
       </p:sp>
@@ -7514,7 +6489,40 @@
                 <a:ea typeface="Calibri" pitchFamily="34" charset="-122"/>
                 <a:cs typeface="Calibri" pitchFamily="34" charset="-120"/>
               </a:rPr>
-              <a:t>Dosya yükleme saldırısı (file upload)</a:t>
+              <a:t>Dosya </a:t>
+            </a:r>
+            <a:r>
+              <a:rPr lang="en-US" sz="1100" dirty="0" err="1">
+                <a:solidFill>
+                  <a:srgbClr val="64748B"/>
+                </a:solidFill>
+                <a:latin typeface="Calibri" pitchFamily="34" charset="0"/>
+                <a:ea typeface="Calibri" pitchFamily="34" charset="-122"/>
+                <a:cs typeface="Calibri" pitchFamily="34" charset="-120"/>
+              </a:rPr>
+              <a:t>yükleme</a:t>
+            </a:r>
+            <a:r>
+              <a:rPr lang="en-US" sz="1100" dirty="0">
+                <a:solidFill>
+                  <a:srgbClr val="64748B"/>
+                </a:solidFill>
+                <a:latin typeface="Calibri" pitchFamily="34" charset="0"/>
+                <a:ea typeface="Calibri" pitchFamily="34" charset="-122"/>
+                <a:cs typeface="Calibri" pitchFamily="34" charset="-120"/>
+              </a:rPr>
+              <a:t> </a:t>
+            </a:r>
+            <a:r>
+              <a:rPr lang="en-US" sz="1100" dirty="0" err="1">
+                <a:solidFill>
+                  <a:srgbClr val="64748B"/>
+                </a:solidFill>
+                <a:latin typeface="Calibri" pitchFamily="34" charset="0"/>
+                <a:ea typeface="Calibri" pitchFamily="34" charset="-122"/>
+                <a:cs typeface="Calibri" pitchFamily="34" charset="-120"/>
+              </a:rPr>
+              <a:t>saldırısı</a:t>
             </a:r>
             <a:endParaRPr lang="en-US" sz="1100" dirty="0"/>
           </a:p>
@@ -7647,17 +6655,6 @@
             <a:pPr marL="0" indent="0" algn="l">
               <a:buNone/>
             </a:pPr>
-            <a:r>
-              <a:rPr lang="en-US" sz="1100" dirty="0">
-                <a:solidFill>
-                  <a:srgbClr val="64748B"/>
-                </a:solidFill>
-                <a:latin typeface="Calibri" pitchFamily="34" charset="0"/>
-                <a:ea typeface="Calibri" pitchFamily="34" charset="-122"/>
-                <a:cs typeface="Calibri" pitchFamily="34" charset="-120"/>
-              </a:rPr>
-              <a:t>Derinlikli case study</a:t>
-            </a:r>
             <a:endParaRPr lang="en-US" sz="1100" dirty="0"/>
           </a:p>
         </p:txBody>
@@ -7670,7 +6667,7 @@
         </p:nvSpPr>
         <p:spPr>
           <a:xfrm>
-            <a:off x="530352" y="2898648"/>
+            <a:off x="560832" y="2898648"/>
             <a:ext cx="3566160" cy="1371600"/>
           </a:xfrm>
           <a:prstGeom prst="rect">
@@ -7767,45 +6764,6 @@
       </p:sp>
       <p:sp>
         <p:nvSpPr>
-          <p:cNvPr id="19" name="Text 17"/>
-          <p:cNvSpPr/>
-          <p:nvPr/>
-        </p:nvSpPr>
-        <p:spPr>
-          <a:xfrm>
-            <a:off x="713232" y="3831336"/>
-            <a:ext cx="3200400" cy="365760"/>
-          </a:xfrm>
-          <a:prstGeom prst="rect">
-            <a:avLst/>
-          </a:prstGeom>
-          <a:noFill/>
-          <a:ln/>
-        </p:spPr>
-        <p:txBody>
-          <a:bodyPr wrap="square" lIns="0" tIns="0" rIns="0" bIns="0" rtlCol="0" anchor="t"/>
-          <a:lstStyle/>
-          <a:p>
-            <a:pPr marL="0" indent="0" algn="l">
-              <a:buNone/>
-            </a:pPr>
-            <a:r>
-              <a:rPr lang="en-US" sz="1100" dirty="0">
-                <a:solidFill>
-                  <a:srgbClr val="64748B"/>
-                </a:solidFill>
-                <a:latin typeface="Calibri" pitchFamily="34" charset="0"/>
-                <a:ea typeface="Calibri" pitchFamily="34" charset="-122"/>
-                <a:cs typeface="Calibri" pitchFamily="34" charset="-120"/>
-              </a:rPr>
-              <a:t>Anomali detection paradigması</a:t>
-            </a:r>
-            <a:endParaRPr lang="en-US" sz="1100" dirty="0"/>
-          </a:p>
-        </p:txBody>
-      </p:sp>
-      <p:sp>
-        <p:nvSpPr>
           <p:cNvPr id="20" name="Shape 18"/>
           <p:cNvSpPr/>
           <p:nvPr/>
@@ -7940,7 +6898,7 @@
                 <a:ea typeface="Calibri" pitchFamily="34" charset="-122"/>
                 <a:cs typeface="Calibri" pitchFamily="34" charset="-120"/>
               </a:rPr>
-              <a:t>Offline, top-10% mean pooling</a:t>
+              <a:t>top-10% mean pooling</a:t>
             </a:r>
             <a:endParaRPr lang="en-US" sz="1100" dirty="0"/>
           </a:p>
@@ -8263,7 +7221,18 @@
                 <a:ea typeface="Calibri" pitchFamily="34" charset="-122"/>
                 <a:cs typeface="Calibri" pitchFamily="34" charset="-120"/>
               </a:rPr>
-              <a:t>Train Pencere</a:t>
+              <a:t>Train</a:t>
+            </a:r>
+            <a:r>
+              <a:rPr lang="tr-TR" sz="1000" dirty="0">
+                <a:solidFill>
+                  <a:srgbClr val="CBD5E1"/>
+                </a:solidFill>
+                <a:latin typeface="Calibri" pitchFamily="34" charset="0"/>
+                <a:ea typeface="Calibri" pitchFamily="34" charset="-122"/>
+                <a:cs typeface="Calibri" pitchFamily="34" charset="-120"/>
+              </a:rPr>
+              <a:t> Windows</a:t>
             </a:r>
             <a:endParaRPr lang="en-US" sz="1000" dirty="0"/>
           </a:p>
@@ -8489,6 +7458,28 @@
               <a:buNone/>
             </a:pPr>
             <a:r>
+              <a:rPr lang="en-US" sz="1000" dirty="0" err="1">
+                <a:solidFill>
+                  <a:srgbClr val="CBD5E1"/>
+                </a:solidFill>
+                <a:latin typeface="Calibri" pitchFamily="34" charset="0"/>
+                <a:ea typeface="Calibri" pitchFamily="34" charset="-122"/>
+                <a:cs typeface="Calibri" pitchFamily="34" charset="-120"/>
+              </a:rPr>
+              <a:t>Anomal</a:t>
+            </a:r>
+            <a:r>
+              <a:rPr lang="tr-TR" sz="1000" dirty="0">
+                <a:solidFill>
+                  <a:srgbClr val="CBD5E1"/>
+                </a:solidFill>
+                <a:latin typeface="Calibri" pitchFamily="34" charset="0"/>
+                <a:ea typeface="Calibri" pitchFamily="34" charset="-122"/>
+                <a:cs typeface="Calibri" pitchFamily="34" charset="-120"/>
+              </a:rPr>
+              <a:t>y Test</a:t>
+            </a:r>
+            <a:r>
               <a:rPr lang="en-US" sz="1000" dirty="0">
                 <a:solidFill>
                   <a:srgbClr val="CBD5E1"/>
@@ -8497,7 +7488,7 @@
                 <a:ea typeface="Calibri" pitchFamily="34" charset="-122"/>
                 <a:cs typeface="Calibri" pitchFamily="34" charset="-120"/>
               </a:rPr>
-              <a:t>Anomali Trace</a:t>
+              <a:t> Trace</a:t>
             </a:r>
             <a:endParaRPr lang="en-US" sz="1000" dirty="0"/>
           </a:p>
@@ -8958,21 +7949,20 @@
             <a:endParaRPr lang="en-US" sz="900" dirty="0"/>
           </a:p>
           <a:p>
-            <a:pPr marL="0" indent="0" algn="ctr">
-              <a:buNone/>
-            </a:pPr>
-            <a:r>
-              <a:rPr lang="en-US" sz="900" b="1" dirty="0">
-                <a:solidFill>
-                  <a:srgbClr val="FFFFFF"/>
-                </a:solidFill>
-                <a:latin typeface="Calibri" pitchFamily="34" charset="0"/>
-                <a:ea typeface="Calibri" pitchFamily="34" charset="-122"/>
-                <a:cs typeface="Calibri" pitchFamily="34" charset="-120"/>
-              </a:rPr>
-              <a:t>Gruplama</a:t>
-            </a:r>
-            <a:endParaRPr lang="en-US" sz="900" dirty="0"/>
+            <a:pPr algn="ctr"/>
+            <a:r>
+              <a:rPr lang="tr-TR" sz="900" b="1" dirty="0" err="1">
+                <a:solidFill>
+                  <a:schemeClr val="bg1"/>
+                </a:solidFill>
+              </a:rPr>
+              <a:t>Grouping</a:t>
+            </a:r>
+            <a:endParaRPr lang="en-US" sz="900" b="1" dirty="0">
+              <a:solidFill>
+                <a:schemeClr val="bg1"/>
+              </a:solidFill>
+            </a:endParaRPr>
           </a:p>
         </p:txBody>
       </p:sp>
@@ -9436,8 +8426,8 @@
         </p:nvSpPr>
         <p:spPr>
           <a:xfrm>
-            <a:off x="10529316" y="1545336"/>
-            <a:ext cx="1051560" cy="731520"/>
+            <a:off x="10698480" y="1545336"/>
+            <a:ext cx="792714" cy="731520"/>
           </a:xfrm>
           <a:prstGeom prst="rect">
             <a:avLst/>
@@ -9449,38 +8439,36 @@
           <a:bodyPr wrap="square" lIns="0" tIns="0" rIns="0" bIns="0" rtlCol="0" anchor="ctr"/>
           <a:lstStyle/>
           <a:p>
-            <a:pPr marL="0" indent="0" algn="ctr">
-              <a:buNone/>
-            </a:pPr>
-            <a:r>
-              <a:rPr lang="en-US" sz="900" b="1" dirty="0">
-                <a:solidFill>
-                  <a:srgbClr val="FFFFFF"/>
-                </a:solidFill>
-                <a:latin typeface="Calibri" pitchFamily="34" charset="0"/>
-                <a:ea typeface="Calibri" pitchFamily="34" charset="-122"/>
-                <a:cs typeface="Calibri" pitchFamily="34" charset="-120"/>
+            <a:pPr algn="ctr"/>
+            <a:r>
+              <a:rPr lang="tr-TR" sz="900" b="1" dirty="0" err="1">
+                <a:solidFill>
+                  <a:schemeClr val="bg1"/>
+                </a:solidFill>
               </a:rPr>
               <a:t>Trace</a:t>
             </a:r>
-            <a:endParaRPr lang="en-US" sz="900" dirty="0"/>
-          </a:p>
-          <a:p>
-            <a:pPr marL="0" indent="0" algn="ctr">
-              <a:buNone/>
-            </a:pPr>
-            <a:r>
-              <a:rPr lang="en-US" sz="900" b="1" dirty="0">
-                <a:solidFill>
-                  <a:srgbClr val="FFFFFF"/>
-                </a:solidFill>
-                <a:latin typeface="Calibri" pitchFamily="34" charset="0"/>
-                <a:ea typeface="Calibri" pitchFamily="34" charset="-122"/>
-                <a:cs typeface="Calibri" pitchFamily="34" charset="-120"/>
-              </a:rPr>
-              <a:t>Karar</a:t>
-            </a:r>
-            <a:endParaRPr lang="en-US" sz="900" dirty="0"/>
+            <a:r>
+              <a:rPr lang="tr-TR" sz="900" b="1" dirty="0">
+                <a:solidFill>
+                  <a:schemeClr val="bg1"/>
+                </a:solidFill>
+              </a:rPr>
+              <a:t>-Level </a:t>
+            </a:r>
+            <a:r>
+              <a:rPr lang="tr-TR" sz="900" b="1" dirty="0" err="1">
+                <a:solidFill>
+                  <a:schemeClr val="bg1"/>
+                </a:solidFill>
+              </a:rPr>
+              <a:t>Decision</a:t>
+            </a:r>
+            <a:endParaRPr lang="en-US" sz="900" b="1" dirty="0">
+              <a:solidFill>
+                <a:schemeClr val="bg1"/>
+              </a:solidFill>
+            </a:endParaRPr>
           </a:p>
         </p:txBody>
       </p:sp>
@@ -9821,6 +8809,17 @@
               <a:buNone/>
             </a:pPr>
             <a:r>
+              <a:rPr lang="tr-TR" sz="1200" dirty="0" err="1">
+                <a:solidFill>
+                  <a:srgbClr val="0D9488"/>
+                </a:solidFill>
+                <a:latin typeface="Calibri" pitchFamily="34" charset="0"/>
+                <a:ea typeface="Calibri" pitchFamily="34" charset="-122"/>
+                <a:cs typeface="Calibri" pitchFamily="34" charset="-120"/>
+              </a:rPr>
+              <a:t>strict</a:t>
+            </a:r>
+            <a:r>
               <a:rPr lang="en-US" sz="1200" dirty="0">
                 <a:solidFill>
                   <a:srgbClr val="0D9488"/>
@@ -9829,7 +8828,7 @@
                 <a:ea typeface="Calibri" pitchFamily="34" charset="-122"/>
                 <a:cs typeface="Calibri" pitchFamily="34" charset="-120"/>
               </a:rPr>
-              <a:t>Sıkı + boundary discard</a:t>
+              <a:t> + boundary discard</a:t>
             </a:r>
             <a:endParaRPr lang="en-US" sz="1200" dirty="0"/>
           </a:p>
@@ -9999,8 +8998,8 @@
         </p:nvSpPr>
         <p:spPr>
           <a:xfrm>
-            <a:off x="472440" y="4425696"/>
-            <a:ext cx="11247120" cy="923544"/>
+            <a:off x="1547446" y="4425696"/>
+            <a:ext cx="8475785" cy="923544"/>
           </a:xfrm>
           <a:prstGeom prst="rect">
             <a:avLst/>
@@ -10024,8 +9023,8 @@
         </p:nvSpPr>
         <p:spPr>
           <a:xfrm>
-            <a:off x="699516" y="4608575"/>
-            <a:ext cx="10881360" cy="520153"/>
+            <a:off x="1916723" y="4608575"/>
+            <a:ext cx="7867358" cy="520153"/>
           </a:xfrm>
           <a:prstGeom prst="rect">
             <a:avLst/>
@@ -10571,7 +9570,7 @@
         </p:nvSpPr>
         <p:spPr>
           <a:xfrm>
-            <a:off x="4297680" y="1261872"/>
+            <a:off x="4312920" y="1261872"/>
             <a:ext cx="3566160" cy="4663440"/>
           </a:xfrm>
           <a:prstGeom prst="rect">
@@ -11434,7 +10433,7 @@
           <p:nvPr>
             <p:extLst>
               <p:ext uri="{D42A27DB-BD31-4B8C-83A1-F6EECF244321}">
-                <p14:modId xmlns:p14="http://schemas.microsoft.com/office/powerpoint/2010/main" val="1579011935"/>
+                <p14:modId xmlns:p14="http://schemas.microsoft.com/office/powerpoint/2010/main" val="139499737"/>
               </p:ext>
             </p:extLst>
           </p:nvPr>
@@ -12519,15 +11518,18 @@
                       <a:r>
                         <a:rPr lang="en-US" sz="1400" b="1" dirty="0">
                           <a:solidFill>
-                            <a:srgbClr val="0D9488"/>
+                            <a:schemeClr val="tx2"/>
                           </a:solidFill>
                           <a:latin typeface="Calibri" pitchFamily="34" charset="0"/>
                           <a:ea typeface="Calibri" pitchFamily="34" charset="-122"/>
                           <a:cs typeface="Calibri" pitchFamily="34" charset="-120"/>
                         </a:rPr>
-                        <a:t>0.943 ★</a:t>
+                        <a:t>0.943</a:t>
                       </a:r>
                       <a:endParaRPr lang="en-US" sz="1400" dirty="0">
+                        <a:solidFill>
+                          <a:schemeClr val="tx2"/>
+                        </a:solidFill>
                         <a:latin typeface="Calibri" charset="0"/>
                         <a:ea typeface="Calibri" charset="0"/>
                         <a:cs typeface="Calibri" charset="0"/>
@@ -12661,7 +11663,7 @@
                           <a:ea typeface="Calibri" pitchFamily="34" charset="-122"/>
                           <a:cs typeface="Calibri" pitchFamily="34" charset="-120"/>
                         </a:rPr>
-                        <a:t>0.9962 ★</a:t>
+                        <a:t>0.9962</a:t>
                       </a:r>
                       <a:endParaRPr lang="en-US" sz="1400" dirty="0">
                         <a:latin typeface="Calibri" charset="0"/>
@@ -12866,7 +11868,7 @@
                           <a:ea typeface="Calibri" pitchFamily="34" charset="-122"/>
                           <a:cs typeface="Calibri" pitchFamily="34" charset="-120"/>
                         </a:rPr>
-                        <a:t>1.000 ★</a:t>
+                        <a:t>1.000</a:t>
                       </a:r>
                       <a:endParaRPr lang="en-US" sz="1400" dirty="0">
                         <a:latin typeface="Calibri" charset="0"/>
@@ -13121,45 +12123,6 @@
       </p:graphicFrame>
       <p:sp>
         <p:nvSpPr>
-          <p:cNvPr id="5" name="Text 2"/>
-          <p:cNvSpPr/>
-          <p:nvPr/>
-        </p:nvSpPr>
-        <p:spPr>
-          <a:xfrm>
-            <a:off x="457200" y="3493008"/>
-            <a:ext cx="11247120" cy="274320"/>
-          </a:xfrm>
-          <a:prstGeom prst="rect">
-            <a:avLst/>
-          </a:prstGeom>
-          <a:noFill/>
-          <a:ln/>
-        </p:spPr>
-        <p:txBody>
-          <a:bodyPr wrap="square" lIns="0" tIns="0" rIns="0" bIns="0" rtlCol="0" anchor="ctr"/>
-          <a:lstStyle/>
-          <a:p>
-            <a:pPr marL="0" indent="0" algn="r">
-              <a:buNone/>
-            </a:pPr>
-            <a:r>
-              <a:rPr lang="en-US" sz="1000" i="1" dirty="0">
-                <a:solidFill>
-                  <a:srgbClr val="64748B"/>
-                </a:solidFill>
-                <a:latin typeface="Calibri" pitchFamily="34" charset="0"/>
-                <a:ea typeface="Calibri" pitchFamily="34" charset="-122"/>
-                <a:cs typeface="Calibri" pitchFamily="34" charset="-120"/>
-              </a:rPr>
-              <a:t>★ AUC-ROC threshold'dan bağımsız metrik  ·  0.50 = rastgele  ·  1.00 = mükemmel ayrım</a:t>
-            </a:r>
-            <a:endParaRPr lang="en-US" sz="1000" dirty="0"/>
-          </a:p>
-        </p:txBody>
-      </p:sp>
-      <p:sp>
-        <p:nvSpPr>
           <p:cNvPr id="6" name="Shape 3"/>
           <p:cNvSpPr/>
           <p:nvPr/>
@@ -13602,7 +12565,7 @@
         <p:spPr>
           <a:xfrm>
             <a:off x="457200" y="5504688"/>
-            <a:ext cx="11247120" cy="749808"/>
+            <a:ext cx="11201400" cy="749808"/>
           </a:xfrm>
           <a:prstGeom prst="rect">
             <a:avLst/>
@@ -13750,19 +12713,41 @@
           <a:bodyPr wrap="square" lIns="0" tIns="0" rIns="0" bIns="0" rtlCol="0" anchor="ctr"/>
           <a:lstStyle/>
           <a:p>
-            <a:pPr marL="0" indent="0" algn="l">
-              <a:buNone/>
-            </a:pPr>
             <a:r>
               <a:rPr lang="en-US" sz="2700" b="1" dirty="0">
-                <a:solidFill>
-                  <a:srgbClr val="1E2D40"/>
-                </a:solidFill>
-                <a:latin typeface="Calibri" pitchFamily="34" charset="0"/>
-                <a:ea typeface="Calibri" pitchFamily="34" charset="-122"/>
-                <a:cs typeface="Calibri" pitchFamily="34" charset="-120"/>
-              </a:rPr>
-              <a:t>Threshold Sağlamlığı ve AUC Karşılaştırması</a:t>
+                <a:latin typeface="Calibri" pitchFamily="34" charset="0"/>
+                <a:ea typeface="Calibri" pitchFamily="34" charset="-122"/>
+                <a:cs typeface="Calibri" pitchFamily="34" charset="-120"/>
+              </a:rPr>
+              <a:t>Threshold Sağlamlığı </a:t>
+            </a:r>
+            <a:r>
+              <a:rPr lang="en-US" sz="2700" b="1" dirty="0" err="1">
+                <a:latin typeface="Calibri" pitchFamily="34" charset="0"/>
+                <a:ea typeface="Calibri" pitchFamily="34" charset="-122"/>
+                <a:cs typeface="Calibri" pitchFamily="34" charset="-120"/>
+              </a:rPr>
+              <a:t>ve</a:t>
+            </a:r>
+            <a:r>
+              <a:rPr lang="en-US" sz="2700" b="1" dirty="0">
+                <a:latin typeface="Calibri" pitchFamily="34" charset="0"/>
+                <a:ea typeface="Calibri" pitchFamily="34" charset="-122"/>
+                <a:cs typeface="Calibri" pitchFamily="34" charset="-120"/>
+              </a:rPr>
+              <a:t> </a:t>
+            </a:r>
+            <a:r>
+              <a:rPr lang="tr-TR" sz="2800" b="1" dirty="0"/>
+              <a:t>ROC</a:t>
+            </a:r>
+            <a:r>
+              <a:rPr lang="en-US" sz="2700" b="1" dirty="0">
+                <a:latin typeface="Calibri" pitchFamily="34" charset="0"/>
+                <a:ea typeface="Calibri" pitchFamily="34" charset="-122"/>
+                <a:cs typeface="Calibri" pitchFamily="34" charset="-120"/>
+              </a:rPr>
+              <a:t> Karşılaştırması</a:t>
             </a:r>
             <a:endParaRPr lang="en-US" sz="2700" dirty="0"/>
           </a:p>
@@ -13776,7 +12761,7 @@
         </p:nvSpPr>
         <p:spPr>
           <a:xfrm>
-            <a:off x="487680" y="1687068"/>
+            <a:off x="324428" y="1917076"/>
             <a:ext cx="6858000" cy="301752"/>
           </a:xfrm>
           <a:prstGeom prst="rect">
@@ -13816,14 +12801,14 @@
           <p:nvPr>
             <p:extLst>
               <p:ext uri="{D42A27DB-BD31-4B8C-83A1-F6EECF244321}">
-                <p14:modId xmlns:p14="http://schemas.microsoft.com/office/powerpoint/2010/main" val="3945102106"/>
+                <p14:modId xmlns:p14="http://schemas.microsoft.com/office/powerpoint/2010/main" val="2096114861"/>
               </p:ext>
             </p:extLst>
           </p:nvPr>
         </p:nvGraphicFramePr>
         <p:xfrm>
-          <a:off x="457200" y="2514600"/>
-          <a:ext cx="6858000" cy="1828800"/>
+          <a:off x="140677" y="2523392"/>
+          <a:ext cx="6858000" cy="1820008"/>
         </p:xfrm>
         <a:graphic>
           <a:graphicData uri="http://schemas.openxmlformats.org/drawingml/2006/table">
@@ -13866,7 +12851,7 @@
                   </a:extLst>
                 </a:gridCol>
               </a:tblGrid>
-              <a:tr h="457200">
+              <a:tr h="448408">
                 <a:tc>
                   <a:txBody>
                     <a:bodyPr/>
@@ -15236,7 +14221,7 @@
         </p:nvSpPr>
         <p:spPr>
           <a:xfrm>
-            <a:off x="457200" y="4846320"/>
+            <a:off x="191655" y="4649371"/>
             <a:ext cx="6858000" cy="347472"/>
           </a:xfrm>
           <a:prstGeom prst="rect">
@@ -15253,7 +14238,7 @@
               <a:buNone/>
             </a:pPr>
             <a:r>
-              <a:rPr lang="en-US" sz="1000" i="1" dirty="0">
+              <a:rPr lang="en-US" sz="1200" i="1" dirty="0">
                 <a:solidFill>
                   <a:srgbClr val="64748B"/>
                 </a:solidFill>
@@ -15261,73 +14246,42 @@
                 <a:ea typeface="Calibri" pitchFamily="34" charset="-122"/>
                 <a:cs typeface="Calibri" pitchFamily="34" charset="-120"/>
               </a:rPr>
-              <a:t>q90: daha agresif (↑ recall, ↑ FPR)   ·   q95: seçilen ana çalışma noktası (↑ precision, ↓ FPR)</a:t>
-            </a:r>
-            <a:endParaRPr lang="en-US" sz="1000" dirty="0"/>
-          </a:p>
-        </p:txBody>
-      </p:sp>
-      <p:sp>
-        <p:nvSpPr>
-          <p:cNvPr id="7" name="Text 4"/>
-          <p:cNvSpPr/>
-          <p:nvPr/>
-        </p:nvSpPr>
-        <p:spPr>
-          <a:xfrm>
-            <a:off x="7772400" y="1536192"/>
-            <a:ext cx="3931920" cy="301752"/>
-          </a:xfrm>
-          <a:prstGeom prst="rect">
-            <a:avLst/>
-          </a:prstGeom>
-          <a:noFill/>
-          <a:ln/>
-        </p:spPr>
-        <p:txBody>
-          <a:bodyPr wrap="square" lIns="0" tIns="0" rIns="0" bIns="0" rtlCol="0" anchor="ctr"/>
-          <a:lstStyle/>
-          <a:p>
-            <a:pPr marL="0" indent="0">
-              <a:buNone/>
-            </a:pPr>
-            <a:r>
-              <a:rPr lang="en-US" sz="1200" b="1" dirty="0">
-                <a:solidFill>
-                  <a:srgbClr val="1E2D40"/>
-                </a:solidFill>
-                <a:latin typeface="Calibri" pitchFamily="34" charset="0"/>
-                <a:ea typeface="Calibri" pitchFamily="34" charset="-122"/>
-                <a:cs typeface="Calibri" pitchFamily="34" charset="-120"/>
-              </a:rPr>
-              <a:t>AUC-ROC (Threshold'dan Bağımsız)</a:t>
+              <a:t>q90: (↑ recall, ↑ FPR)   ·   q95: (↑ precision, ↓ FPR)</a:t>
             </a:r>
             <a:endParaRPr lang="en-US" sz="1200" dirty="0"/>
           </a:p>
         </p:txBody>
       </p:sp>
-      <p:graphicFrame>
-        <p:nvGraphicFramePr>
-          <p:cNvPr id="5" name="Chart 0"/>
-          <p:cNvGraphicFramePr/>
-          <p:nvPr>
-            <p:extLst>
-              <p:ext uri="{D42A27DB-BD31-4B8C-83A1-F6EECF244321}">
-                <p14:modId xmlns:p14="http://schemas.microsoft.com/office/powerpoint/2010/main" val="3343657950"/>
-              </p:ext>
-            </p:extLst>
-          </p:nvPr>
-        </p:nvGraphicFramePr>
-        <p:xfrm>
-          <a:off x="7802880" y="2121408"/>
-          <a:ext cx="3931920" cy="2377440"/>
-        </p:xfrm>
-        <a:graphic>
-          <a:graphicData uri="http://schemas.openxmlformats.org/drawingml/2006/chart">
-            <c:chart xmlns:c="http://schemas.openxmlformats.org/drawingml/2006/chart" xmlns:r="http://schemas.openxmlformats.org/officeDocument/2006/relationships" r:id="rId3"/>
-          </a:graphicData>
-        </a:graphic>
-      </p:graphicFrame>
+      <p:pic>
+        <p:nvPicPr>
+          <p:cNvPr id="10" name="Resim 9">
+            <a:extLst>
+              <a:ext uri="{FF2B5EF4-FFF2-40B4-BE49-F238E27FC236}">
+                <a16:creationId xmlns:a16="http://schemas.microsoft.com/office/drawing/2014/main" id="{814FDDCC-206D-03EF-AE8E-A7C7441E1951}"/>
+              </a:ext>
+            </a:extLst>
+          </p:cNvPr>
+          <p:cNvPicPr>
+            <a:picLocks noChangeAspect="1"/>
+          </p:cNvPicPr>
+          <p:nvPr/>
+        </p:nvPicPr>
+        <p:blipFill>
+          <a:blip r:embed="rId3"/>
+          <a:stretch>
+            <a:fillRect/>
+          </a:stretch>
+        </p:blipFill>
+        <p:spPr>
+          <a:xfrm>
+            <a:off x="7049655" y="1770416"/>
+            <a:ext cx="5142346" cy="3601683"/>
+          </a:xfrm>
+          <a:prstGeom prst="rect">
+            <a:avLst/>
+          </a:prstGeom>
+        </p:spPr>
+      </p:pic>
     </p:spTree>
   </p:cSld>
   <p:clrMapOvr>
@@ -17321,31 +16275,6 @@
       </p:graphicFrame>
       <p:sp>
         <p:nvSpPr>
-          <p:cNvPr id="25" name="Shape 22"/>
-          <p:cNvSpPr/>
-          <p:nvPr/>
-        </p:nvSpPr>
-        <p:spPr>
-          <a:xfrm>
-            <a:off x="7132320" y="3730752"/>
-            <a:ext cx="64008" cy="420624"/>
-          </a:xfrm>
-          <a:prstGeom prst="rect">
-            <a:avLst/>
-          </a:prstGeom>
-          <a:solidFill>
-            <a:srgbClr val="2D3F55"/>
-          </a:solidFill>
-          <a:ln w="12700">
-            <a:solidFill>
-              <a:srgbClr val="2D3F55"/>
-            </a:solidFill>
-            <a:prstDash val="solid"/>
-          </a:ln>
-        </p:spPr>
-      </p:sp>
-      <p:sp>
-        <p:nvSpPr>
           <p:cNvPr id="26" name="Text 23"/>
           <p:cNvSpPr/>
           <p:nvPr/>
@@ -17353,7 +16282,7 @@
         <p:spPr>
           <a:xfrm>
             <a:off x="7315200" y="3730752"/>
-            <a:ext cx="4343400" cy="420624"/>
+            <a:ext cx="4572000" cy="420624"/>
           </a:xfrm>
           <a:prstGeom prst="rect">
             <a:avLst/>
@@ -17365,19 +16294,17 @@
           <a:bodyPr wrap="square" lIns="0" tIns="0" rIns="0" bIns="0" rtlCol="0" anchor="ctr"/>
           <a:lstStyle/>
           <a:p>
-            <a:pPr marL="0" indent="0" algn="l">
-              <a:buNone/>
-            </a:pPr>
-            <a:r>
-              <a:rPr lang="en-US" sz="1200" dirty="0">
-                <a:solidFill>
-                  <a:srgbClr val="334155"/>
-                </a:solidFill>
-                <a:latin typeface="Calibri" pitchFamily="34" charset="0"/>
-                <a:ea typeface="Calibri" pitchFamily="34" charset="-122"/>
-                <a:cs typeface="Calibri" pitchFamily="34" charset="-120"/>
-              </a:rPr>
-              <a:t>STIDE 18 anomaliyi kaçırıyor — LSTM bu açığı kapatıyor</a:t>
+            <a:r>
+              <a:rPr lang="tr-TR" sz="1200" dirty="0"/>
+              <a:t>STIDE daha fazla anomali </a:t>
+            </a:r>
+            <a:r>
+              <a:rPr lang="tr-TR" sz="1200" dirty="0" err="1"/>
+              <a:t>trace</a:t>
+            </a:r>
+            <a:r>
+              <a:rPr lang="tr-TR" sz="1200" dirty="0"/>
+              <a:t> kaçırıyor; LSTM modeller bu açığı azaltıyor.</a:t>
             </a:r>
             <a:endParaRPr lang="en-US" sz="1200" dirty="0"/>
           </a:p>
@@ -17385,31 +16312,6 @@
       </p:sp>
       <p:sp>
         <p:nvSpPr>
-          <p:cNvPr id="27" name="Shape 24"/>
-          <p:cNvSpPr/>
-          <p:nvPr/>
-        </p:nvSpPr>
-        <p:spPr>
-          <a:xfrm>
-            <a:off x="7132320" y="4279392"/>
-            <a:ext cx="64008" cy="420624"/>
-          </a:xfrm>
-          <a:prstGeom prst="rect">
-            <a:avLst/>
-          </a:prstGeom>
-          <a:solidFill>
-            <a:srgbClr val="0D9488"/>
-          </a:solidFill>
-          <a:ln w="12700">
-            <a:solidFill>
-              <a:srgbClr val="0D9488"/>
-            </a:solidFill>
-            <a:prstDash val="solid"/>
-          </a:ln>
-        </p:spPr>
-      </p:sp>
-      <p:sp>
-        <p:nvSpPr>
           <p:cNvPr id="28" name="Text 25"/>
           <p:cNvSpPr/>
           <p:nvPr/>
@@ -17417,7 +16319,7 @@
         <p:spPr>
           <a:xfrm>
             <a:off x="7315200" y="4279392"/>
-            <a:ext cx="4343400" cy="420624"/>
+            <a:ext cx="4510454" cy="420624"/>
           </a:xfrm>
           <a:prstGeom prst="rect">
             <a:avLst/>
@@ -17429,48 +16331,29 @@
           <a:bodyPr wrap="square" lIns="0" tIns="0" rIns="0" bIns="0" rtlCol="0" anchor="ctr"/>
           <a:lstStyle/>
           <a:p>
-            <a:pPr marL="0" indent="0" algn="l">
-              <a:buNone/>
-            </a:pPr>
-            <a:r>
-              <a:rPr lang="en-US" sz="1200" dirty="0">
-                <a:solidFill>
-                  <a:srgbClr val="334155"/>
-                </a:solidFill>
-                <a:latin typeface="Calibri" pitchFamily="34" charset="0"/>
-                <a:ea typeface="Calibri" pitchFamily="34" charset="-122"/>
-                <a:cs typeface="Calibri" pitchFamily="34" charset="-120"/>
-              </a:rPr>
-              <a:t>LSTM Syscall: aynı FP, FN 18 → 7'ye iniyor (↑ recall)</a:t>
+            <a:r>
+              <a:rPr lang="tr-TR" sz="1200" dirty="0"/>
+              <a:t>LSTM </a:t>
+            </a:r>
+            <a:r>
+              <a:rPr lang="tr-TR" sz="1200" dirty="0" err="1"/>
+              <a:t>Syscall</a:t>
+            </a:r>
+            <a:r>
+              <a:rPr lang="tr-TR" sz="1200" dirty="0"/>
+              <a:t>, aynı FP sayısını koruyarak </a:t>
+            </a:r>
+            <a:r>
+              <a:rPr lang="tr-TR" sz="1200" dirty="0" err="1"/>
+              <a:t>FN’yi</a:t>
+            </a:r>
+            <a:r>
+              <a:rPr lang="tr-TR" sz="1200" dirty="0"/>
+              <a:t> 18’den 7’ye düşürüyor.</a:t>
             </a:r>
             <a:endParaRPr lang="en-US" sz="1200" dirty="0"/>
           </a:p>
         </p:txBody>
-      </p:sp>
-      <p:sp>
-        <p:nvSpPr>
-          <p:cNvPr id="29" name="Shape 26"/>
-          <p:cNvSpPr/>
-          <p:nvPr/>
-        </p:nvSpPr>
-        <p:spPr>
-          <a:xfrm>
-            <a:off x="7132320" y="4828032"/>
-            <a:ext cx="64008" cy="420624"/>
-          </a:xfrm>
-          <a:prstGeom prst="rect">
-            <a:avLst/>
-          </a:prstGeom>
-          <a:solidFill>
-            <a:srgbClr val="14B8A6"/>
-          </a:solidFill>
-          <a:ln w="12700">
-            <a:solidFill>
-              <a:srgbClr val="14B8A6"/>
-            </a:solidFill>
-            <a:prstDash val="solid"/>
-          </a:ln>
-        </p:spPr>
       </p:sp>
       <p:sp>
         <p:nvSpPr>
@@ -17498,78 +16381,11 @@
             </a:pPr>
             <a:r>
               <a:rPr lang="en-US" sz="1200" dirty="0">
-                <a:solidFill>
-                  <a:srgbClr val="334155"/>
-                </a:solidFill>
                 <a:latin typeface="Calibri" pitchFamily="34" charset="0"/>
                 <a:ea typeface="Calibri" pitchFamily="34" charset="-122"/>
                 <a:cs typeface="Calibri" pitchFamily="34" charset="-120"/>
               </a:rPr>
               <a:t>LSTM Context: FN = 0 ama FP artıyor (13 vs 6)</a:t>
-            </a:r>
-            <a:endParaRPr lang="en-US" sz="1200" dirty="0"/>
-          </a:p>
-        </p:txBody>
-      </p:sp>
-      <p:sp>
-        <p:nvSpPr>
-          <p:cNvPr id="31" name="Shape 28"/>
-          <p:cNvSpPr/>
-          <p:nvPr/>
-        </p:nvSpPr>
-        <p:spPr>
-          <a:xfrm>
-            <a:off x="457200" y="5532120"/>
-            <a:ext cx="11247120" cy="749808"/>
-          </a:xfrm>
-          <a:prstGeom prst="rect">
-            <a:avLst/>
-          </a:prstGeom>
-          <a:solidFill>
-            <a:srgbClr val="1E2D40"/>
-          </a:solidFill>
-          <a:ln w="12700">
-            <a:solidFill>
-              <a:srgbClr val="1E2D40"/>
-            </a:solidFill>
-            <a:prstDash val="solid"/>
-          </a:ln>
-        </p:spPr>
-      </p:sp>
-      <p:sp>
-        <p:nvSpPr>
-          <p:cNvPr id="32" name="Text 29"/>
-          <p:cNvSpPr/>
-          <p:nvPr/>
-        </p:nvSpPr>
-        <p:spPr>
-          <a:xfrm>
-            <a:off x="640080" y="5532120"/>
-            <a:ext cx="10881360" cy="749808"/>
-          </a:xfrm>
-          <a:prstGeom prst="rect">
-            <a:avLst/>
-          </a:prstGeom>
-          <a:noFill/>
-          <a:ln/>
-        </p:spPr>
-        <p:txBody>
-          <a:bodyPr wrap="square" lIns="0" tIns="0" rIns="0" bIns="0" rtlCol="0" anchor="ctr"/>
-          <a:lstStyle/>
-          <a:p>
-            <a:pPr marL="0" indent="0" algn="ctr">
-              <a:buNone/>
-            </a:pPr>
-            <a:r>
-              <a:rPr lang="en-US" sz="1200" i="1" dirty="0">
-                <a:solidFill>
-                  <a:srgbClr val="FFFFFF"/>
-                </a:solidFill>
-                <a:latin typeface="Calibri" pitchFamily="34" charset="0"/>
-                <a:ea typeface="Calibri" pitchFamily="34" charset="-122"/>
-                <a:cs typeface="Calibri" pitchFamily="34" charset="-120"/>
-              </a:rPr>
-              <a:t>LSTM Syscall: yanlış alarm artırmadan 11 ek anomali yakaladı  ·  Güvenlik öncelikli kullanım: Context modeli (FN = 0, ancak ↑ FPR)</a:t>
             </a:r>
             <a:endParaRPr lang="en-US" sz="1200" dirty="0"/>
           </a:p>
